--- a/docs/pptx/auc3/ritu-auc3-linsubhr-dosedisc-grade2.pptx
+++ b/docs/pptx/auc3/ritu-auc3-linsubhr-dosedisc-grade2.pptx
@@ -2443,7 +2443,7 @@
           </p:nvSpPr>
           <p:spPr>
             <a:xfrm>
-              <a:off x="980186" y="1896563"/>
+              <a:off x="980739" y="1896563"/>
               <a:ext cx="0" cy="3826579"/>
             </a:xfrm>
             <a:custGeom>
@@ -2486,7 +2486,7 @@
           </p:nvSpPr>
           <p:spPr>
             <a:xfrm>
-              <a:off x="3262630" y="1896563"/>
+              <a:off x="3260798" y="1896563"/>
               <a:ext cx="0" cy="3826579"/>
             </a:xfrm>
             <a:custGeom>
@@ -2529,7 +2529,7 @@
           </p:nvSpPr>
           <p:spPr>
             <a:xfrm>
-              <a:off x="5545073" y="1896563"/>
+              <a:off x="5540858" y="1896563"/>
               <a:ext cx="0" cy="3826579"/>
             </a:xfrm>
             <a:custGeom>
@@ -2572,7 +2572,7 @@
           </p:nvSpPr>
           <p:spPr>
             <a:xfrm>
-              <a:off x="7827517" y="1896563"/>
+              <a:off x="7820918" y="1896563"/>
               <a:ext cx="0" cy="3826579"/>
             </a:xfrm>
             <a:custGeom>
@@ -2830,7 +2830,7 @@
           </p:nvSpPr>
           <p:spPr>
             <a:xfrm>
-              <a:off x="2121408" y="1896563"/>
+              <a:off x="2120768" y="1896563"/>
               <a:ext cx="0" cy="3826579"/>
             </a:xfrm>
             <a:custGeom>
@@ -2873,7 +2873,7 @@
           </p:nvSpPr>
           <p:spPr>
             <a:xfrm>
-              <a:off x="4403852" y="1896563"/>
+              <a:off x="4400828" y="1896563"/>
               <a:ext cx="0" cy="3826579"/>
             </a:xfrm>
             <a:custGeom>
@@ -2916,7 +2916,7 @@
           </p:nvSpPr>
           <p:spPr>
             <a:xfrm>
-              <a:off x="6686295" y="1896563"/>
+              <a:off x="6680888" y="1896563"/>
               <a:ext cx="0" cy="3826579"/>
             </a:xfrm>
             <a:custGeom>
@@ -2959,612 +2959,612 @@
           </p:nvSpPr>
           <p:spPr>
             <a:xfrm>
-              <a:off x="1172049" y="2342631"/>
-              <a:ext cx="7090630" cy="2909677"/>
+              <a:off x="1172049" y="2001980"/>
+              <a:ext cx="7090630" cy="3266706"/>
             </a:xfrm>
             <a:custGeom>
               <a:avLst/>
               <a:pathLst>
-                <a:path w="7090630" h="2909677">
+                <a:path w="7090630" h="3266706">
                   <a:moveTo>
-                    <a:pt x="0" y="2115282"/>
+                    <a:pt x="0" y="2495410"/>
                   </a:moveTo>
                   <a:lnTo>
-                    <a:pt x="71622" y="2120809"/>
-                  </a:lnTo>
-                  <a:lnTo>
-                    <a:pt x="143245" y="2126307"/>
-                  </a:lnTo>
-                  <a:lnTo>
-                    <a:pt x="214867" y="2131777"/>
-                  </a:lnTo>
-                  <a:lnTo>
-                    <a:pt x="286490" y="2137220"/>
-                  </a:lnTo>
-                  <a:lnTo>
-                    <a:pt x="358112" y="2142635"/>
-                  </a:lnTo>
-                  <a:lnTo>
-                    <a:pt x="429735" y="2148022"/>
-                  </a:lnTo>
-                  <a:lnTo>
-                    <a:pt x="501357" y="2153383"/>
-                  </a:lnTo>
-                  <a:lnTo>
-                    <a:pt x="572980" y="2158716"/>
-                  </a:lnTo>
-                  <a:lnTo>
-                    <a:pt x="644602" y="2164022"/>
-                  </a:lnTo>
-                  <a:lnTo>
-                    <a:pt x="716225" y="2169301"/>
-                  </a:lnTo>
-                  <a:lnTo>
-                    <a:pt x="787847" y="2174554"/>
-                  </a:lnTo>
-                  <a:lnTo>
-                    <a:pt x="859470" y="2179780"/>
-                  </a:lnTo>
-                  <a:lnTo>
-                    <a:pt x="931092" y="2184979"/>
-                  </a:lnTo>
-                  <a:lnTo>
-                    <a:pt x="1002715" y="2190152"/>
-                  </a:lnTo>
-                  <a:lnTo>
-                    <a:pt x="1074337" y="2195299"/>
-                  </a:lnTo>
-                  <a:lnTo>
-                    <a:pt x="1145960" y="2200420"/>
-                  </a:lnTo>
-                  <a:lnTo>
-                    <a:pt x="1217582" y="2205515"/>
-                  </a:lnTo>
-                  <a:lnTo>
-                    <a:pt x="1289205" y="2210584"/>
-                  </a:lnTo>
-                  <a:lnTo>
-                    <a:pt x="1360827" y="2215628"/>
-                  </a:lnTo>
-                  <a:lnTo>
-                    <a:pt x="1432450" y="2220646"/>
-                  </a:lnTo>
-                  <a:lnTo>
-                    <a:pt x="1504073" y="2225639"/>
-                  </a:lnTo>
-                  <a:lnTo>
-                    <a:pt x="1575695" y="2230606"/>
-                  </a:lnTo>
-                  <a:lnTo>
-                    <a:pt x="1647318" y="2235548"/>
-                  </a:lnTo>
-                  <a:lnTo>
-                    <a:pt x="1718940" y="2240465"/>
-                  </a:lnTo>
-                  <a:lnTo>
-                    <a:pt x="1790563" y="2245357"/>
-                  </a:lnTo>
-                  <a:lnTo>
-                    <a:pt x="1862185" y="2250225"/>
-                  </a:lnTo>
-                  <a:lnTo>
-                    <a:pt x="1933808" y="2255067"/>
-                  </a:lnTo>
-                  <a:lnTo>
-                    <a:pt x="2005430" y="2259886"/>
-                  </a:lnTo>
-                  <a:lnTo>
-                    <a:pt x="2077053" y="2264680"/>
-                  </a:lnTo>
-                  <a:lnTo>
-                    <a:pt x="2148675" y="2269449"/>
-                  </a:lnTo>
-                  <a:lnTo>
-                    <a:pt x="2220298" y="2274195"/>
-                  </a:lnTo>
-                  <a:lnTo>
-                    <a:pt x="2291920" y="2278916"/>
-                  </a:lnTo>
-                  <a:lnTo>
-                    <a:pt x="2363543" y="2283614"/>
-                  </a:lnTo>
-                  <a:lnTo>
-                    <a:pt x="2435165" y="2288287"/>
-                  </a:lnTo>
-                  <a:lnTo>
-                    <a:pt x="2506788" y="2292937"/>
-                  </a:lnTo>
-                  <a:lnTo>
-                    <a:pt x="2578410" y="2297564"/>
-                  </a:lnTo>
-                  <a:lnTo>
-                    <a:pt x="2650033" y="2302167"/>
-                  </a:lnTo>
-                  <a:lnTo>
-                    <a:pt x="2721655" y="2306747"/>
-                  </a:lnTo>
-                  <a:lnTo>
-                    <a:pt x="2793278" y="2311303"/>
-                  </a:lnTo>
-                  <a:lnTo>
-                    <a:pt x="2864901" y="2315837"/>
-                  </a:lnTo>
-                  <a:lnTo>
-                    <a:pt x="2936523" y="2320347"/>
-                  </a:lnTo>
-                  <a:lnTo>
-                    <a:pt x="3008146" y="2324835"/>
-                  </a:lnTo>
-                  <a:lnTo>
-                    <a:pt x="3079768" y="2329300"/>
-                  </a:lnTo>
-                  <a:lnTo>
-                    <a:pt x="3151391" y="2333742"/>
-                  </a:lnTo>
-                  <a:lnTo>
-                    <a:pt x="3223013" y="2330886"/>
-                  </a:lnTo>
-                  <a:lnTo>
-                    <a:pt x="3294636" y="2309583"/>
-                  </a:lnTo>
-                  <a:lnTo>
-                    <a:pt x="3366258" y="2287762"/>
-                  </a:lnTo>
-                  <a:lnTo>
-                    <a:pt x="3437881" y="2265410"/>
-                  </a:lnTo>
-                  <a:lnTo>
-                    <a:pt x="3509503" y="2242514"/>
-                  </a:lnTo>
-                  <a:lnTo>
-                    <a:pt x="3581126" y="2219061"/>
-                  </a:lnTo>
-                  <a:lnTo>
-                    <a:pt x="3652748" y="2195037"/>
-                  </a:lnTo>
-                  <a:lnTo>
-                    <a:pt x="3724371" y="2170429"/>
-                  </a:lnTo>
-                  <a:lnTo>
-                    <a:pt x="3795993" y="2145222"/>
-                  </a:lnTo>
-                  <a:lnTo>
-                    <a:pt x="3867616" y="2119403"/>
-                  </a:lnTo>
-                  <a:lnTo>
-                    <a:pt x="3939238" y="2092955"/>
-                  </a:lnTo>
-                  <a:lnTo>
-                    <a:pt x="4010861" y="2065863"/>
-                  </a:lnTo>
-                  <a:lnTo>
-                    <a:pt x="4082483" y="2038113"/>
-                  </a:lnTo>
-                  <a:lnTo>
-                    <a:pt x="4154106" y="2009688"/>
-                  </a:lnTo>
-                  <a:lnTo>
-                    <a:pt x="4225729" y="1980571"/>
-                  </a:lnTo>
-                  <a:lnTo>
-                    <a:pt x="4297351" y="1950745"/>
-                  </a:lnTo>
-                  <a:lnTo>
-                    <a:pt x="4368974" y="1920194"/>
-                  </a:lnTo>
-                  <a:lnTo>
-                    <a:pt x="4440596" y="1888900"/>
-                  </a:lnTo>
-                  <a:lnTo>
-                    <a:pt x="4512219" y="1856845"/>
-                  </a:lnTo>
-                  <a:lnTo>
-                    <a:pt x="4583841" y="1824009"/>
-                  </a:lnTo>
-                  <a:lnTo>
-                    <a:pt x="4655464" y="1790375"/>
-                  </a:lnTo>
-                  <a:lnTo>
-                    <a:pt x="4727086" y="1755923"/>
-                  </a:lnTo>
-                  <a:lnTo>
-                    <a:pt x="4798709" y="1720633"/>
-                  </a:lnTo>
-                  <a:lnTo>
-                    <a:pt x="4870331" y="1684484"/>
-                  </a:lnTo>
-                  <a:lnTo>
-                    <a:pt x="4941954" y="1647455"/>
-                  </a:lnTo>
-                  <a:lnTo>
-                    <a:pt x="5013576" y="1609526"/>
-                  </a:lnTo>
-                  <a:lnTo>
-                    <a:pt x="5085199" y="1570675"/>
-                  </a:lnTo>
-                  <a:lnTo>
-                    <a:pt x="5156821" y="1530878"/>
-                  </a:lnTo>
-                  <a:lnTo>
-                    <a:pt x="5228444" y="1490112"/>
-                  </a:lnTo>
-                  <a:lnTo>
-                    <a:pt x="5300066" y="1448356"/>
-                  </a:lnTo>
-                  <a:lnTo>
-                    <a:pt x="5371689" y="1405583"/>
-                  </a:lnTo>
-                  <a:lnTo>
-                    <a:pt x="5443311" y="1361770"/>
-                  </a:lnTo>
-                  <a:lnTo>
-                    <a:pt x="5514934" y="1316891"/>
-                  </a:lnTo>
-                  <a:lnTo>
-                    <a:pt x="5586557" y="1270920"/>
-                  </a:lnTo>
-                  <a:lnTo>
-                    <a:pt x="5658179" y="1223830"/>
-                  </a:lnTo>
-                  <a:lnTo>
-                    <a:pt x="5729802" y="1175596"/>
-                  </a:lnTo>
-                  <a:lnTo>
-                    <a:pt x="5801424" y="1126188"/>
-                  </a:lnTo>
-                  <a:lnTo>
-                    <a:pt x="5873047" y="1075577"/>
-                  </a:lnTo>
-                  <a:lnTo>
-                    <a:pt x="5944669" y="1023736"/>
-                  </a:lnTo>
-                  <a:lnTo>
-                    <a:pt x="6016292" y="970633"/>
-                  </a:lnTo>
-                  <a:lnTo>
-                    <a:pt x="6087914" y="916239"/>
-                  </a:lnTo>
-                  <a:lnTo>
-                    <a:pt x="6159537" y="860522"/>
-                  </a:lnTo>
-                  <a:lnTo>
-                    <a:pt x="6231159" y="803448"/>
-                  </a:lnTo>
-                  <a:lnTo>
-                    <a:pt x="6302782" y="744987"/>
-                  </a:lnTo>
-                  <a:lnTo>
-                    <a:pt x="6374404" y="685103"/>
-                  </a:lnTo>
-                  <a:lnTo>
-                    <a:pt x="6446027" y="623763"/>
-                  </a:lnTo>
-                  <a:lnTo>
-                    <a:pt x="6517649" y="560930"/>
-                  </a:lnTo>
-                  <a:lnTo>
-                    <a:pt x="6589272" y="496569"/>
-                  </a:lnTo>
-                  <a:lnTo>
-                    <a:pt x="6660894" y="430642"/>
-                  </a:lnTo>
-                  <a:lnTo>
-                    <a:pt x="6732517" y="363111"/>
-                  </a:lnTo>
-                  <a:lnTo>
-                    <a:pt x="6804139" y="293937"/>
-                  </a:lnTo>
-                  <a:lnTo>
-                    <a:pt x="6875762" y="223080"/>
-                  </a:lnTo>
-                  <a:lnTo>
-                    <a:pt x="6947385" y="150500"/>
-                  </a:lnTo>
-                  <a:lnTo>
-                    <a:pt x="7019007" y="76154"/>
+                    <a:pt x="71622" y="2499930"/>
+                  </a:lnTo>
+                  <a:lnTo>
+                    <a:pt x="143245" y="2504432"/>
+                  </a:lnTo>
+                  <a:lnTo>
+                    <a:pt x="214867" y="2508913"/>
+                  </a:lnTo>
+                  <a:lnTo>
+                    <a:pt x="286490" y="2513376"/>
+                  </a:lnTo>
+                  <a:lnTo>
+                    <a:pt x="358112" y="2517819"/>
+                  </a:lnTo>
+                  <a:lnTo>
+                    <a:pt x="429735" y="2522243"/>
+                  </a:lnTo>
+                  <a:lnTo>
+                    <a:pt x="501357" y="2526649"/>
+                  </a:lnTo>
+                  <a:lnTo>
+                    <a:pt x="572980" y="2531035"/>
+                  </a:lnTo>
+                  <a:lnTo>
+                    <a:pt x="644602" y="2535402"/>
+                  </a:lnTo>
+                  <a:lnTo>
+                    <a:pt x="716225" y="2539751"/>
+                  </a:lnTo>
+                  <a:lnTo>
+                    <a:pt x="787847" y="2544081"/>
+                  </a:lnTo>
+                  <a:lnTo>
+                    <a:pt x="859470" y="2548392"/>
+                  </a:lnTo>
+                  <a:lnTo>
+                    <a:pt x="931092" y="2552685"/>
+                  </a:lnTo>
+                  <a:lnTo>
+                    <a:pt x="1002715" y="2556960"/>
+                  </a:lnTo>
+                  <a:lnTo>
+                    <a:pt x="1074337" y="2561216"/>
+                  </a:lnTo>
+                  <a:lnTo>
+                    <a:pt x="1145960" y="2565453"/>
+                  </a:lnTo>
+                  <a:lnTo>
+                    <a:pt x="1217582" y="2569673"/>
+                  </a:lnTo>
+                  <a:lnTo>
+                    <a:pt x="1289205" y="2573874"/>
+                  </a:lnTo>
+                  <a:lnTo>
+                    <a:pt x="1360827" y="2578058"/>
+                  </a:lnTo>
+                  <a:lnTo>
+                    <a:pt x="1432450" y="2582223"/>
+                  </a:lnTo>
+                  <a:lnTo>
+                    <a:pt x="1504073" y="2586370"/>
+                  </a:lnTo>
+                  <a:lnTo>
+                    <a:pt x="1575695" y="2590500"/>
+                  </a:lnTo>
+                  <a:lnTo>
+                    <a:pt x="1647318" y="2594612"/>
+                  </a:lnTo>
+                  <a:lnTo>
+                    <a:pt x="1718940" y="2598706"/>
+                  </a:lnTo>
+                  <a:lnTo>
+                    <a:pt x="1790563" y="2602783"/>
+                  </a:lnTo>
+                  <a:lnTo>
+                    <a:pt x="1862185" y="2606842"/>
+                  </a:lnTo>
+                  <a:lnTo>
+                    <a:pt x="1933808" y="2610884"/>
+                  </a:lnTo>
+                  <a:lnTo>
+                    <a:pt x="2005430" y="2614908"/>
+                  </a:lnTo>
+                  <a:lnTo>
+                    <a:pt x="2077053" y="2618915"/>
+                  </a:lnTo>
+                  <a:lnTo>
+                    <a:pt x="2148675" y="2622904"/>
+                  </a:lnTo>
+                  <a:lnTo>
+                    <a:pt x="2220298" y="2626877"/>
+                  </a:lnTo>
+                  <a:lnTo>
+                    <a:pt x="2291920" y="2630833"/>
+                  </a:lnTo>
+                  <a:lnTo>
+                    <a:pt x="2363543" y="2634771"/>
+                  </a:lnTo>
+                  <a:lnTo>
+                    <a:pt x="2435165" y="2638693"/>
+                  </a:lnTo>
+                  <a:lnTo>
+                    <a:pt x="2506788" y="2642598"/>
+                  </a:lnTo>
+                  <a:lnTo>
+                    <a:pt x="2578410" y="2646485"/>
+                  </a:lnTo>
+                  <a:lnTo>
+                    <a:pt x="2650033" y="2650357"/>
+                  </a:lnTo>
+                  <a:lnTo>
+                    <a:pt x="2721655" y="2654211"/>
+                  </a:lnTo>
+                  <a:lnTo>
+                    <a:pt x="2793278" y="2658049"/>
+                  </a:lnTo>
+                  <a:lnTo>
+                    <a:pt x="2864901" y="2661871"/>
+                  </a:lnTo>
+                  <a:lnTo>
+                    <a:pt x="2936523" y="2665676"/>
+                  </a:lnTo>
+                  <a:lnTo>
+                    <a:pt x="3008146" y="2669465"/>
+                  </a:lnTo>
+                  <a:lnTo>
+                    <a:pt x="3079768" y="2673237"/>
+                  </a:lnTo>
+                  <a:lnTo>
+                    <a:pt x="3151391" y="2676994"/>
+                  </a:lnTo>
+                  <a:lnTo>
+                    <a:pt x="3223013" y="2658355"/>
+                  </a:lnTo>
+                  <a:lnTo>
+                    <a:pt x="3294636" y="2635280"/>
+                  </a:lnTo>
+                  <a:lnTo>
+                    <a:pt x="3366258" y="2611605"/>
+                  </a:lnTo>
+                  <a:lnTo>
+                    <a:pt x="3437881" y="2587316"/>
+                  </a:lnTo>
+                  <a:lnTo>
+                    <a:pt x="3509503" y="2562397"/>
+                  </a:lnTo>
+                  <a:lnTo>
+                    <a:pt x="3581126" y="2536830"/>
+                  </a:lnTo>
+                  <a:lnTo>
+                    <a:pt x="3652748" y="2510600"/>
+                  </a:lnTo>
+                  <a:lnTo>
+                    <a:pt x="3724371" y="2483689"/>
+                  </a:lnTo>
+                  <a:lnTo>
+                    <a:pt x="3795993" y="2456079"/>
+                  </a:lnTo>
+                  <a:lnTo>
+                    <a:pt x="3867616" y="2427753"/>
+                  </a:lnTo>
+                  <a:lnTo>
+                    <a:pt x="3939238" y="2398691"/>
+                  </a:lnTo>
+                  <a:lnTo>
+                    <a:pt x="4010861" y="2368875"/>
+                  </a:lnTo>
+                  <a:lnTo>
+                    <a:pt x="4082483" y="2338284"/>
+                  </a:lnTo>
+                  <a:lnTo>
+                    <a:pt x="4154106" y="2306900"/>
+                  </a:lnTo>
+                  <a:lnTo>
+                    <a:pt x="4225729" y="2274700"/>
+                  </a:lnTo>
+                  <a:lnTo>
+                    <a:pt x="4297351" y="2241665"/>
+                  </a:lnTo>
+                  <a:lnTo>
+                    <a:pt x="4368974" y="2207773"/>
+                  </a:lnTo>
+                  <a:lnTo>
+                    <a:pt x="4440596" y="2173000"/>
+                  </a:lnTo>
+                  <a:lnTo>
+                    <a:pt x="4512219" y="2137325"/>
+                  </a:lnTo>
+                  <a:lnTo>
+                    <a:pt x="4583841" y="2100723"/>
+                  </a:lnTo>
+                  <a:lnTo>
+                    <a:pt x="4655464" y="2063171"/>
+                  </a:lnTo>
+                  <a:lnTo>
+                    <a:pt x="4727086" y="2024645"/>
+                  </a:lnTo>
+                  <a:lnTo>
+                    <a:pt x="4798709" y="1985118"/>
+                  </a:lnTo>
+                  <a:lnTo>
+                    <a:pt x="4870331" y="1944565"/>
+                  </a:lnTo>
+                  <a:lnTo>
+                    <a:pt x="4941954" y="1902960"/>
+                  </a:lnTo>
+                  <a:lnTo>
+                    <a:pt x="5013576" y="1860274"/>
+                  </a:lnTo>
+                  <a:lnTo>
+                    <a:pt x="5085199" y="1816480"/>
+                  </a:lnTo>
+                  <a:lnTo>
+                    <a:pt x="5156821" y="1771550"/>
+                  </a:lnTo>
+                  <a:lnTo>
+                    <a:pt x="5228444" y="1725453"/>
+                  </a:lnTo>
+                  <a:lnTo>
+                    <a:pt x="5300066" y="1678159"/>
+                  </a:lnTo>
+                  <a:lnTo>
+                    <a:pt x="5371689" y="1629637"/>
+                  </a:lnTo>
+                  <a:lnTo>
+                    <a:pt x="5443311" y="1579856"/>
+                  </a:lnTo>
+                  <a:lnTo>
+                    <a:pt x="5514934" y="1528783"/>
+                  </a:lnTo>
+                  <a:lnTo>
+                    <a:pt x="5586557" y="1476383"/>
+                  </a:lnTo>
+                  <a:lnTo>
+                    <a:pt x="5658179" y="1422623"/>
+                  </a:lnTo>
+                  <a:lnTo>
+                    <a:pt x="5729802" y="1367468"/>
+                  </a:lnTo>
+                  <a:lnTo>
+                    <a:pt x="5801424" y="1310881"/>
+                  </a:lnTo>
+                  <a:lnTo>
+                    <a:pt x="5873047" y="1252825"/>
+                  </a:lnTo>
+                  <a:lnTo>
+                    <a:pt x="5944669" y="1193261"/>
+                  </a:lnTo>
+                  <a:lnTo>
+                    <a:pt x="6016292" y="1132152"/>
+                  </a:lnTo>
+                  <a:lnTo>
+                    <a:pt x="6087914" y="1069455"/>
+                  </a:lnTo>
+                  <a:lnTo>
+                    <a:pt x="6159537" y="1005132"/>
+                  </a:lnTo>
+                  <a:lnTo>
+                    <a:pt x="6231159" y="939138"/>
+                  </a:lnTo>
+                  <a:lnTo>
+                    <a:pt x="6302782" y="871431"/>
+                  </a:lnTo>
+                  <a:lnTo>
+                    <a:pt x="6374404" y="801967"/>
+                  </a:lnTo>
+                  <a:lnTo>
+                    <a:pt x="6446027" y="730699"/>
+                  </a:lnTo>
+                  <a:lnTo>
+                    <a:pt x="6517649" y="657581"/>
+                  </a:lnTo>
+                  <a:lnTo>
+                    <a:pt x="6589272" y="582565"/>
+                  </a:lnTo>
+                  <a:lnTo>
+                    <a:pt x="6660894" y="505602"/>
+                  </a:lnTo>
+                  <a:lnTo>
+                    <a:pt x="6732517" y="426640"/>
+                  </a:lnTo>
+                  <a:lnTo>
+                    <a:pt x="6804139" y="345629"/>
+                  </a:lnTo>
+                  <a:lnTo>
+                    <a:pt x="6875762" y="262514"/>
+                  </a:lnTo>
+                  <a:lnTo>
+                    <a:pt x="6947385" y="177242"/>
+                  </a:lnTo>
+                  <a:lnTo>
+                    <a:pt x="7019007" y="89756"/>
                   </a:lnTo>
                   <a:lnTo>
                     <a:pt x="7090630" y="0"/>
                   </a:lnTo>
                   <a:lnTo>
-                    <a:pt x="7090630" y="2546386"/>
-                  </a:lnTo>
-                  <a:lnTo>
-                    <a:pt x="7019007" y="2543026"/>
-                  </a:lnTo>
-                  <a:lnTo>
-                    <a:pt x="6947385" y="2539649"/>
-                  </a:lnTo>
-                  <a:lnTo>
-                    <a:pt x="6875762" y="2536254"/>
-                  </a:lnTo>
-                  <a:lnTo>
-                    <a:pt x="6804139" y="2532843"/>
-                  </a:lnTo>
-                  <a:lnTo>
-                    <a:pt x="6732517" y="2529414"/>
-                  </a:lnTo>
-                  <a:lnTo>
-                    <a:pt x="6660894" y="2525967"/>
-                  </a:lnTo>
-                  <a:lnTo>
-                    <a:pt x="6589272" y="2522503"/>
-                  </a:lnTo>
-                  <a:lnTo>
-                    <a:pt x="6517649" y="2519021"/>
-                  </a:lnTo>
-                  <a:lnTo>
-                    <a:pt x="6446027" y="2515522"/>
-                  </a:lnTo>
-                  <a:lnTo>
-                    <a:pt x="6374404" y="2512005"/>
-                  </a:lnTo>
-                  <a:lnTo>
-                    <a:pt x="6302782" y="2508470"/>
-                  </a:lnTo>
-                  <a:lnTo>
-                    <a:pt x="6231159" y="2504917"/>
-                  </a:lnTo>
-                  <a:lnTo>
-                    <a:pt x="6159537" y="2501346"/>
-                  </a:lnTo>
-                  <a:lnTo>
-                    <a:pt x="6087914" y="2497756"/>
-                  </a:lnTo>
-                  <a:lnTo>
-                    <a:pt x="6016292" y="2494149"/>
-                  </a:lnTo>
-                  <a:lnTo>
-                    <a:pt x="5944669" y="2490523"/>
-                  </a:lnTo>
-                  <a:lnTo>
-                    <a:pt x="5873047" y="2486878"/>
-                  </a:lnTo>
-                  <a:lnTo>
-                    <a:pt x="5801424" y="2483215"/>
-                  </a:lnTo>
-                  <a:lnTo>
-                    <a:pt x="5729802" y="2479534"/>
-                  </a:lnTo>
-                  <a:lnTo>
-                    <a:pt x="5658179" y="2475833"/>
-                  </a:lnTo>
-                  <a:lnTo>
-                    <a:pt x="5586557" y="2472114"/>
-                  </a:lnTo>
-                  <a:lnTo>
-                    <a:pt x="5514934" y="2468376"/>
-                  </a:lnTo>
-                  <a:lnTo>
-                    <a:pt x="5443311" y="2464619"/>
-                  </a:lnTo>
-                  <a:lnTo>
-                    <a:pt x="5371689" y="2460843"/>
-                  </a:lnTo>
-                  <a:lnTo>
-                    <a:pt x="5300066" y="2457047"/>
-                  </a:lnTo>
-                  <a:lnTo>
-                    <a:pt x="5228444" y="2453232"/>
-                  </a:lnTo>
-                  <a:lnTo>
-                    <a:pt x="5156821" y="2449398"/>
-                  </a:lnTo>
-                  <a:lnTo>
-                    <a:pt x="5085199" y="2445545"/>
-                  </a:lnTo>
-                  <a:lnTo>
-                    <a:pt x="5013576" y="2441671"/>
-                  </a:lnTo>
-                  <a:lnTo>
-                    <a:pt x="4941954" y="2437778"/>
-                  </a:lnTo>
-                  <a:lnTo>
-                    <a:pt x="4870331" y="2433865"/>
-                  </a:lnTo>
-                  <a:lnTo>
-                    <a:pt x="4798709" y="2429933"/>
-                  </a:lnTo>
-                  <a:lnTo>
-                    <a:pt x="4727086" y="2425980"/>
-                  </a:lnTo>
-                  <a:lnTo>
-                    <a:pt x="4655464" y="2422007"/>
-                  </a:lnTo>
-                  <a:lnTo>
-                    <a:pt x="4583841" y="2418014"/>
-                  </a:lnTo>
-                  <a:lnTo>
-                    <a:pt x="4512219" y="2414000"/>
-                  </a:lnTo>
-                  <a:lnTo>
-                    <a:pt x="4440596" y="2409966"/>
-                  </a:lnTo>
-                  <a:lnTo>
-                    <a:pt x="4368974" y="2405912"/>
-                  </a:lnTo>
-                  <a:lnTo>
-                    <a:pt x="4297351" y="2401837"/>
-                  </a:lnTo>
-                  <a:lnTo>
-                    <a:pt x="4225729" y="2397741"/>
-                  </a:lnTo>
-                  <a:lnTo>
-                    <a:pt x="4154106" y="2393624"/>
-                  </a:lnTo>
-                  <a:lnTo>
-                    <a:pt x="4082483" y="2389487"/>
-                  </a:lnTo>
-                  <a:lnTo>
-                    <a:pt x="4010861" y="2385328"/>
-                  </a:lnTo>
-                  <a:lnTo>
-                    <a:pt x="3939238" y="2381148"/>
-                  </a:lnTo>
-                  <a:lnTo>
-                    <a:pt x="3867616" y="2376947"/>
-                  </a:lnTo>
-                  <a:lnTo>
-                    <a:pt x="3795993" y="2372725"/>
-                  </a:lnTo>
-                  <a:lnTo>
-                    <a:pt x="3724371" y="2368481"/>
-                  </a:lnTo>
-                  <a:lnTo>
-                    <a:pt x="3652748" y="2364215"/>
-                  </a:lnTo>
-                  <a:lnTo>
-                    <a:pt x="3581126" y="2359928"/>
-                  </a:lnTo>
-                  <a:lnTo>
-                    <a:pt x="3509503" y="2355619"/>
-                  </a:lnTo>
-                  <a:lnTo>
-                    <a:pt x="3437881" y="2351288"/>
-                  </a:lnTo>
-                  <a:lnTo>
-                    <a:pt x="3366258" y="2346935"/>
-                  </a:lnTo>
-                  <a:lnTo>
-                    <a:pt x="3294636" y="2342560"/>
-                  </a:lnTo>
-                  <a:lnTo>
-                    <a:pt x="3223013" y="2338162"/>
-                  </a:lnTo>
-                  <a:lnTo>
-                    <a:pt x="3151391" y="2351683"/>
-                  </a:lnTo>
-                  <a:lnTo>
-                    <a:pt x="3079768" y="2371987"/>
-                  </a:lnTo>
-                  <a:lnTo>
-                    <a:pt x="3008146" y="2391808"/>
-                  </a:lnTo>
-                  <a:lnTo>
-                    <a:pt x="2936523" y="2411158"/>
-                  </a:lnTo>
-                  <a:lnTo>
-                    <a:pt x="2864901" y="2430049"/>
-                  </a:lnTo>
-                  <a:lnTo>
-                    <a:pt x="2793278" y="2448491"/>
-                  </a:lnTo>
-                  <a:lnTo>
-                    <a:pt x="2721655" y="2466495"/>
-                  </a:lnTo>
-                  <a:lnTo>
-                    <a:pt x="2650033" y="2484072"/>
-                  </a:lnTo>
-                  <a:lnTo>
-                    <a:pt x="2578410" y="2501231"/>
-                  </a:lnTo>
-                  <a:lnTo>
-                    <a:pt x="2506788" y="2517982"/>
-                  </a:lnTo>
-                  <a:lnTo>
-                    <a:pt x="2435165" y="2534336"/>
-                  </a:lnTo>
-                  <a:lnTo>
-                    <a:pt x="2363543" y="2550301"/>
-                  </a:lnTo>
-                  <a:lnTo>
-                    <a:pt x="2291920" y="2565888"/>
-                  </a:lnTo>
-                  <a:lnTo>
-                    <a:pt x="2220298" y="2581104"/>
-                  </a:lnTo>
-                  <a:lnTo>
-                    <a:pt x="2148675" y="2595958"/>
-                  </a:lnTo>
-                  <a:lnTo>
-                    <a:pt x="2077053" y="2610460"/>
-                  </a:lnTo>
-                  <a:lnTo>
-                    <a:pt x="2005430" y="2624617"/>
-                  </a:lnTo>
-                  <a:lnTo>
-                    <a:pt x="1933808" y="2638439"/>
-                  </a:lnTo>
-                  <a:lnTo>
-                    <a:pt x="1862185" y="2651932"/>
-                  </a:lnTo>
-                  <a:lnTo>
-                    <a:pt x="1790563" y="2665104"/>
-                  </a:lnTo>
-                  <a:lnTo>
-                    <a:pt x="1718940" y="2677964"/>
-                  </a:lnTo>
-                  <a:lnTo>
-                    <a:pt x="1647318" y="2690518"/>
-                  </a:lnTo>
-                  <a:lnTo>
-                    <a:pt x="1575695" y="2702774"/>
-                  </a:lnTo>
-                  <a:lnTo>
-                    <a:pt x="1504073" y="2714739"/>
-                  </a:lnTo>
-                  <a:lnTo>
-                    <a:pt x="1432450" y="2726420"/>
-                  </a:lnTo>
-                  <a:lnTo>
-                    <a:pt x="1360827" y="2737823"/>
-                  </a:lnTo>
-                  <a:lnTo>
-                    <a:pt x="1289205" y="2748956"/>
-                  </a:lnTo>
-                  <a:lnTo>
-                    <a:pt x="1217582" y="2759824"/>
-                  </a:lnTo>
-                  <a:lnTo>
-                    <a:pt x="1145960" y="2770434"/>
-                  </a:lnTo>
-                  <a:lnTo>
-                    <a:pt x="1074337" y="2780793"/>
-                  </a:lnTo>
-                  <a:lnTo>
-                    <a:pt x="1002715" y="2790905"/>
-                  </a:lnTo>
-                  <a:lnTo>
-                    <a:pt x="931092" y="2800777"/>
-                  </a:lnTo>
-                  <a:lnTo>
-                    <a:pt x="859470" y="2810414"/>
-                  </a:lnTo>
-                  <a:lnTo>
-                    <a:pt x="787847" y="2819823"/>
-                  </a:lnTo>
-                  <a:lnTo>
-                    <a:pt x="716225" y="2829008"/>
-                  </a:lnTo>
-                  <a:lnTo>
-                    <a:pt x="644602" y="2837975"/>
-                  </a:lnTo>
-                  <a:lnTo>
-                    <a:pt x="572980" y="2846729"/>
-                  </a:lnTo>
-                  <a:lnTo>
-                    <a:pt x="501357" y="2855275"/>
-                  </a:lnTo>
-                  <a:lnTo>
-                    <a:pt x="429735" y="2863618"/>
-                  </a:lnTo>
-                  <a:lnTo>
-                    <a:pt x="358112" y="2871763"/>
-                  </a:lnTo>
-                  <a:lnTo>
-                    <a:pt x="286490" y="2879715"/>
-                  </a:lnTo>
-                  <a:lnTo>
-                    <a:pt x="214867" y="2887478"/>
-                  </a:lnTo>
-                  <a:lnTo>
-                    <a:pt x="143245" y="2895056"/>
-                  </a:lnTo>
-                  <a:lnTo>
-                    <a:pt x="71622" y="2902455"/>
-                  </a:lnTo>
-                  <a:lnTo>
-                    <a:pt x="0" y="2909677"/>
+                    <a:pt x="7090630" y="2860546"/>
+                  </a:lnTo>
+                  <a:lnTo>
+                    <a:pt x="7019007" y="2857582"/>
+                  </a:lnTo>
+                  <a:lnTo>
+                    <a:pt x="6947385" y="2854605"/>
+                  </a:lnTo>
+                  <a:lnTo>
+                    <a:pt x="6875762" y="2851616"/>
+                  </a:lnTo>
+                  <a:lnTo>
+                    <a:pt x="6804139" y="2848613"/>
+                  </a:lnTo>
+                  <a:lnTo>
+                    <a:pt x="6732517" y="2845597"/>
+                  </a:lnTo>
+                  <a:lnTo>
+                    <a:pt x="6660894" y="2842569"/>
+                  </a:lnTo>
+                  <a:lnTo>
+                    <a:pt x="6589272" y="2839527"/>
+                  </a:lnTo>
+                  <a:lnTo>
+                    <a:pt x="6517649" y="2836473"/>
+                  </a:lnTo>
+                  <a:lnTo>
+                    <a:pt x="6446027" y="2833405"/>
+                  </a:lnTo>
+                  <a:lnTo>
+                    <a:pt x="6374404" y="2830324"/>
+                  </a:lnTo>
+                  <a:lnTo>
+                    <a:pt x="6302782" y="2827229"/>
+                  </a:lnTo>
+                  <a:lnTo>
+                    <a:pt x="6231159" y="2824121"/>
+                  </a:lnTo>
+                  <a:lnTo>
+                    <a:pt x="6159537" y="2821000"/>
+                  </a:lnTo>
+                  <a:lnTo>
+                    <a:pt x="6087914" y="2817865"/>
+                  </a:lnTo>
+                  <a:lnTo>
+                    <a:pt x="6016292" y="2814717"/>
+                  </a:lnTo>
+                  <a:lnTo>
+                    <a:pt x="5944669" y="2811555"/>
+                  </a:lnTo>
+                  <a:lnTo>
+                    <a:pt x="5873047" y="2808380"/>
+                  </a:lnTo>
+                  <a:lnTo>
+                    <a:pt x="5801424" y="2805191"/>
+                  </a:lnTo>
+                  <a:lnTo>
+                    <a:pt x="5729802" y="2801988"/>
+                  </a:lnTo>
+                  <a:lnTo>
+                    <a:pt x="5658179" y="2798771"/>
+                  </a:lnTo>
+                  <a:lnTo>
+                    <a:pt x="5586557" y="2795540"/>
+                  </a:lnTo>
+                  <a:lnTo>
+                    <a:pt x="5514934" y="2792296"/>
+                  </a:lnTo>
+                  <a:lnTo>
+                    <a:pt x="5443311" y="2789037"/>
+                  </a:lnTo>
+                  <a:lnTo>
+                    <a:pt x="5371689" y="2785765"/>
+                  </a:lnTo>
+                  <a:lnTo>
+                    <a:pt x="5300066" y="2782478"/>
+                  </a:lnTo>
+                  <a:lnTo>
+                    <a:pt x="5228444" y="2779177"/>
+                  </a:lnTo>
+                  <a:lnTo>
+                    <a:pt x="5156821" y="2775862"/>
+                  </a:lnTo>
+                  <a:lnTo>
+                    <a:pt x="5085199" y="2772532"/>
+                  </a:lnTo>
+                  <a:lnTo>
+                    <a:pt x="5013576" y="2769188"/>
+                  </a:lnTo>
+                  <a:lnTo>
+                    <a:pt x="4941954" y="2765830"/>
+                  </a:lnTo>
+                  <a:lnTo>
+                    <a:pt x="4870331" y="2762457"/>
+                  </a:lnTo>
+                  <a:lnTo>
+                    <a:pt x="4798709" y="2759070"/>
+                  </a:lnTo>
+                  <a:lnTo>
+                    <a:pt x="4727086" y="2755668"/>
+                  </a:lnTo>
+                  <a:lnTo>
+                    <a:pt x="4655464" y="2752251"/>
+                  </a:lnTo>
+                  <a:lnTo>
+                    <a:pt x="4583841" y="2748820"/>
+                  </a:lnTo>
+                  <a:lnTo>
+                    <a:pt x="4512219" y="2745373"/>
+                  </a:lnTo>
+                  <a:lnTo>
+                    <a:pt x="4440596" y="2741912"/>
+                  </a:lnTo>
+                  <a:lnTo>
+                    <a:pt x="4368974" y="2738436"/>
+                  </a:lnTo>
+                  <a:lnTo>
+                    <a:pt x="4297351" y="2734945"/>
+                  </a:lnTo>
+                  <a:lnTo>
+                    <a:pt x="4225729" y="2731439"/>
+                  </a:lnTo>
+                  <a:lnTo>
+                    <a:pt x="4154106" y="2727918"/>
+                  </a:lnTo>
+                  <a:lnTo>
+                    <a:pt x="4082483" y="2724381"/>
+                  </a:lnTo>
+                  <a:lnTo>
+                    <a:pt x="4010861" y="2720829"/>
+                  </a:lnTo>
+                  <a:lnTo>
+                    <a:pt x="3939238" y="2717262"/>
+                  </a:lnTo>
+                  <a:lnTo>
+                    <a:pt x="3867616" y="2713680"/>
+                  </a:lnTo>
+                  <a:lnTo>
+                    <a:pt x="3795993" y="2710082"/>
+                  </a:lnTo>
+                  <a:lnTo>
+                    <a:pt x="3724371" y="2706469"/>
+                  </a:lnTo>
+                  <a:lnTo>
+                    <a:pt x="3652748" y="2702839"/>
+                  </a:lnTo>
+                  <a:lnTo>
+                    <a:pt x="3581126" y="2699195"/>
+                  </a:lnTo>
+                  <a:lnTo>
+                    <a:pt x="3509503" y="2695534"/>
+                  </a:lnTo>
+                  <a:lnTo>
+                    <a:pt x="3437881" y="2691858"/>
+                  </a:lnTo>
+                  <a:lnTo>
+                    <a:pt x="3366258" y="2688166"/>
+                  </a:lnTo>
+                  <a:lnTo>
+                    <a:pt x="3294636" y="2684458"/>
+                  </a:lnTo>
+                  <a:lnTo>
+                    <a:pt x="3223013" y="2680734"/>
+                  </a:lnTo>
+                  <a:lnTo>
+                    <a:pt x="3151391" y="2680847"/>
+                  </a:lnTo>
+                  <a:lnTo>
+                    <a:pt x="3079768" y="2702769"/>
+                  </a:lnTo>
+                  <a:lnTo>
+                    <a:pt x="3008146" y="2724137"/>
+                  </a:lnTo>
+                  <a:lnTo>
+                    <a:pt x="2936523" y="2744964"/>
+                  </a:lnTo>
+                  <a:lnTo>
+                    <a:pt x="2864901" y="2765264"/>
+                  </a:lnTo>
+                  <a:lnTo>
+                    <a:pt x="2793278" y="2785050"/>
+                  </a:lnTo>
+                  <a:lnTo>
+                    <a:pt x="2721655" y="2804336"/>
+                  </a:lnTo>
+                  <a:lnTo>
+                    <a:pt x="2650033" y="2823133"/>
+                  </a:lnTo>
+                  <a:lnTo>
+                    <a:pt x="2578410" y="2841455"/>
+                  </a:lnTo>
+                  <a:lnTo>
+                    <a:pt x="2506788" y="2859314"/>
+                  </a:lnTo>
+                  <a:lnTo>
+                    <a:pt x="2435165" y="2876720"/>
+                  </a:lnTo>
+                  <a:lnTo>
+                    <a:pt x="2363543" y="2893686"/>
+                  </a:lnTo>
+                  <a:lnTo>
+                    <a:pt x="2291920" y="2910223"/>
+                  </a:lnTo>
+                  <a:lnTo>
+                    <a:pt x="2220298" y="2926342"/>
+                  </a:lnTo>
+                  <a:lnTo>
+                    <a:pt x="2148675" y="2942052"/>
+                  </a:lnTo>
+                  <a:lnTo>
+                    <a:pt x="2077053" y="2957365"/>
+                  </a:lnTo>
+                  <a:lnTo>
+                    <a:pt x="2005430" y="2972291"/>
+                  </a:lnTo>
+                  <a:lnTo>
+                    <a:pt x="1933808" y="2986838"/>
+                  </a:lnTo>
+                  <a:lnTo>
+                    <a:pt x="1862185" y="3001018"/>
+                  </a:lnTo>
+                  <a:lnTo>
+                    <a:pt x="1790563" y="3014839"/>
+                  </a:lnTo>
+                  <a:lnTo>
+                    <a:pt x="1718940" y="3028310"/>
+                  </a:lnTo>
+                  <a:lnTo>
+                    <a:pt x="1647318" y="3041441"/>
+                  </a:lnTo>
+                  <a:lnTo>
+                    <a:pt x="1575695" y="3054239"/>
+                  </a:lnTo>
+                  <a:lnTo>
+                    <a:pt x="1504073" y="3066713"/>
+                  </a:lnTo>
+                  <a:lnTo>
+                    <a:pt x="1432450" y="3078872"/>
+                  </a:lnTo>
+                  <a:lnTo>
+                    <a:pt x="1360827" y="3090723"/>
+                  </a:lnTo>
+                  <a:lnTo>
+                    <a:pt x="1289205" y="3102274"/>
+                  </a:lnTo>
+                  <a:lnTo>
+                    <a:pt x="1217582" y="3113533"/>
+                  </a:lnTo>
+                  <a:lnTo>
+                    <a:pt x="1145960" y="3124506"/>
+                  </a:lnTo>
+                  <a:lnTo>
+                    <a:pt x="1074337" y="3135203"/>
+                  </a:lnTo>
+                  <a:lnTo>
+                    <a:pt x="1002715" y="3145628"/>
+                  </a:lnTo>
+                  <a:lnTo>
+                    <a:pt x="931092" y="3155790"/>
+                  </a:lnTo>
+                  <a:lnTo>
+                    <a:pt x="859470" y="3165695"/>
+                  </a:lnTo>
+                  <a:lnTo>
+                    <a:pt x="787847" y="3175349"/>
+                  </a:lnTo>
+                  <a:lnTo>
+                    <a:pt x="716225" y="3184759"/>
+                  </a:lnTo>
+                  <a:lnTo>
+                    <a:pt x="644602" y="3193930"/>
+                  </a:lnTo>
+                  <a:lnTo>
+                    <a:pt x="572980" y="3202870"/>
+                  </a:lnTo>
+                  <a:lnTo>
+                    <a:pt x="501357" y="3211583"/>
+                  </a:lnTo>
+                  <a:lnTo>
+                    <a:pt x="429735" y="3220076"/>
+                  </a:lnTo>
+                  <a:lnTo>
+                    <a:pt x="358112" y="3228354"/>
+                  </a:lnTo>
+                  <a:lnTo>
+                    <a:pt x="286490" y="3236423"/>
+                  </a:lnTo>
+                  <a:lnTo>
+                    <a:pt x="214867" y="3244287"/>
+                  </a:lnTo>
+                  <a:lnTo>
+                    <a:pt x="143245" y="3251953"/>
+                  </a:lnTo>
+                  <a:lnTo>
+                    <a:pt x="71622" y="3259424"/>
+                  </a:lnTo>
+                  <a:lnTo>
+                    <a:pt x="0" y="3266706"/>
                   </a:lnTo>
                   <a:close/>
                 </a:path>
@@ -3590,309 +3590,309 @@
           </p:nvSpPr>
           <p:spPr>
             <a:xfrm>
-              <a:off x="1172049" y="2342631"/>
-              <a:ext cx="7090630" cy="2333742"/>
+              <a:off x="1172049" y="2001980"/>
+              <a:ext cx="7090630" cy="2676994"/>
             </a:xfrm>
             <a:custGeom>
               <a:avLst/>
               <a:pathLst>
-                <a:path w="7090630" h="2333742">
+                <a:path w="7090630" h="2676994">
                   <a:moveTo>
-                    <a:pt x="0" y="2115282"/>
+                    <a:pt x="0" y="2495410"/>
                   </a:moveTo>
                   <a:lnTo>
-                    <a:pt x="71622" y="2120809"/>
-                  </a:lnTo>
-                  <a:lnTo>
-                    <a:pt x="143245" y="2126307"/>
-                  </a:lnTo>
-                  <a:lnTo>
-                    <a:pt x="214867" y="2131777"/>
-                  </a:lnTo>
-                  <a:lnTo>
-                    <a:pt x="286490" y="2137220"/>
-                  </a:lnTo>
-                  <a:lnTo>
-                    <a:pt x="358112" y="2142635"/>
-                  </a:lnTo>
-                  <a:lnTo>
-                    <a:pt x="429735" y="2148022"/>
-                  </a:lnTo>
-                  <a:lnTo>
-                    <a:pt x="501357" y="2153383"/>
-                  </a:lnTo>
-                  <a:lnTo>
-                    <a:pt x="572980" y="2158716"/>
-                  </a:lnTo>
-                  <a:lnTo>
-                    <a:pt x="644602" y="2164022"/>
-                  </a:lnTo>
-                  <a:lnTo>
-                    <a:pt x="716225" y="2169301"/>
-                  </a:lnTo>
-                  <a:lnTo>
-                    <a:pt x="787847" y="2174554"/>
-                  </a:lnTo>
-                  <a:lnTo>
-                    <a:pt x="859470" y="2179780"/>
-                  </a:lnTo>
-                  <a:lnTo>
-                    <a:pt x="931092" y="2184979"/>
-                  </a:lnTo>
-                  <a:lnTo>
-                    <a:pt x="1002715" y="2190152"/>
-                  </a:lnTo>
-                  <a:lnTo>
-                    <a:pt x="1074337" y="2195299"/>
-                  </a:lnTo>
-                  <a:lnTo>
-                    <a:pt x="1145960" y="2200420"/>
-                  </a:lnTo>
-                  <a:lnTo>
-                    <a:pt x="1217582" y="2205515"/>
-                  </a:lnTo>
-                  <a:lnTo>
-                    <a:pt x="1289205" y="2210584"/>
-                  </a:lnTo>
-                  <a:lnTo>
-                    <a:pt x="1360827" y="2215628"/>
-                  </a:lnTo>
-                  <a:lnTo>
-                    <a:pt x="1432450" y="2220646"/>
-                  </a:lnTo>
-                  <a:lnTo>
-                    <a:pt x="1504073" y="2225639"/>
-                  </a:lnTo>
-                  <a:lnTo>
-                    <a:pt x="1575695" y="2230606"/>
-                  </a:lnTo>
-                  <a:lnTo>
-                    <a:pt x="1647318" y="2235548"/>
-                  </a:lnTo>
-                  <a:lnTo>
-                    <a:pt x="1718940" y="2240465"/>
-                  </a:lnTo>
-                  <a:lnTo>
-                    <a:pt x="1790563" y="2245357"/>
-                  </a:lnTo>
-                  <a:lnTo>
-                    <a:pt x="1862185" y="2250225"/>
-                  </a:lnTo>
-                  <a:lnTo>
-                    <a:pt x="1933808" y="2255067"/>
-                  </a:lnTo>
-                  <a:lnTo>
-                    <a:pt x="2005430" y="2259886"/>
-                  </a:lnTo>
-                  <a:lnTo>
-                    <a:pt x="2077053" y="2264680"/>
-                  </a:lnTo>
-                  <a:lnTo>
-                    <a:pt x="2148675" y="2269449"/>
-                  </a:lnTo>
-                  <a:lnTo>
-                    <a:pt x="2220298" y="2274195"/>
-                  </a:lnTo>
-                  <a:lnTo>
-                    <a:pt x="2291920" y="2278916"/>
-                  </a:lnTo>
-                  <a:lnTo>
-                    <a:pt x="2363543" y="2283614"/>
-                  </a:lnTo>
-                  <a:lnTo>
-                    <a:pt x="2435165" y="2288287"/>
-                  </a:lnTo>
-                  <a:lnTo>
-                    <a:pt x="2506788" y="2292937"/>
-                  </a:lnTo>
-                  <a:lnTo>
-                    <a:pt x="2578410" y="2297564"/>
-                  </a:lnTo>
-                  <a:lnTo>
-                    <a:pt x="2650033" y="2302167"/>
-                  </a:lnTo>
-                  <a:lnTo>
-                    <a:pt x="2721655" y="2306747"/>
-                  </a:lnTo>
-                  <a:lnTo>
-                    <a:pt x="2793278" y="2311303"/>
-                  </a:lnTo>
-                  <a:lnTo>
-                    <a:pt x="2864901" y="2315837"/>
-                  </a:lnTo>
-                  <a:lnTo>
-                    <a:pt x="2936523" y="2320347"/>
-                  </a:lnTo>
-                  <a:lnTo>
-                    <a:pt x="3008146" y="2324835"/>
-                  </a:lnTo>
-                  <a:lnTo>
-                    <a:pt x="3079768" y="2329300"/>
-                  </a:lnTo>
-                  <a:lnTo>
-                    <a:pt x="3151391" y="2333742"/>
-                  </a:lnTo>
-                  <a:lnTo>
-                    <a:pt x="3223013" y="2330886"/>
-                  </a:lnTo>
-                  <a:lnTo>
-                    <a:pt x="3294636" y="2309583"/>
-                  </a:lnTo>
-                  <a:lnTo>
-                    <a:pt x="3366258" y="2287762"/>
-                  </a:lnTo>
-                  <a:lnTo>
-                    <a:pt x="3437881" y="2265410"/>
-                  </a:lnTo>
-                  <a:lnTo>
-                    <a:pt x="3509503" y="2242514"/>
-                  </a:lnTo>
-                  <a:lnTo>
-                    <a:pt x="3581126" y="2219061"/>
-                  </a:lnTo>
-                  <a:lnTo>
-                    <a:pt x="3652748" y="2195037"/>
-                  </a:lnTo>
-                  <a:lnTo>
-                    <a:pt x="3724371" y="2170429"/>
-                  </a:lnTo>
-                  <a:lnTo>
-                    <a:pt x="3795993" y="2145222"/>
-                  </a:lnTo>
-                  <a:lnTo>
-                    <a:pt x="3867616" y="2119403"/>
-                  </a:lnTo>
-                  <a:lnTo>
-                    <a:pt x="3939238" y="2092955"/>
-                  </a:lnTo>
-                  <a:lnTo>
-                    <a:pt x="4010861" y="2065863"/>
-                  </a:lnTo>
-                  <a:lnTo>
-                    <a:pt x="4082483" y="2038113"/>
-                  </a:lnTo>
-                  <a:lnTo>
-                    <a:pt x="4154106" y="2009688"/>
-                  </a:lnTo>
-                  <a:lnTo>
-                    <a:pt x="4225729" y="1980571"/>
-                  </a:lnTo>
-                  <a:lnTo>
-                    <a:pt x="4297351" y="1950745"/>
-                  </a:lnTo>
-                  <a:lnTo>
-                    <a:pt x="4368974" y="1920194"/>
-                  </a:lnTo>
-                  <a:lnTo>
-                    <a:pt x="4440596" y="1888900"/>
-                  </a:lnTo>
-                  <a:lnTo>
-                    <a:pt x="4512219" y="1856845"/>
-                  </a:lnTo>
-                  <a:lnTo>
-                    <a:pt x="4583841" y="1824009"/>
-                  </a:lnTo>
-                  <a:lnTo>
-                    <a:pt x="4655464" y="1790375"/>
-                  </a:lnTo>
-                  <a:lnTo>
-                    <a:pt x="4727086" y="1755923"/>
-                  </a:lnTo>
-                  <a:lnTo>
-                    <a:pt x="4798709" y="1720633"/>
-                  </a:lnTo>
-                  <a:lnTo>
-                    <a:pt x="4870331" y="1684484"/>
-                  </a:lnTo>
-                  <a:lnTo>
-                    <a:pt x="4941954" y="1647455"/>
-                  </a:lnTo>
-                  <a:lnTo>
-                    <a:pt x="5013576" y="1609526"/>
-                  </a:lnTo>
-                  <a:lnTo>
-                    <a:pt x="5085199" y="1570675"/>
-                  </a:lnTo>
-                  <a:lnTo>
-                    <a:pt x="5156821" y="1530878"/>
-                  </a:lnTo>
-                  <a:lnTo>
-                    <a:pt x="5228444" y="1490112"/>
-                  </a:lnTo>
-                  <a:lnTo>
-                    <a:pt x="5300066" y="1448356"/>
-                  </a:lnTo>
-                  <a:lnTo>
-                    <a:pt x="5371689" y="1405583"/>
-                  </a:lnTo>
-                  <a:lnTo>
-                    <a:pt x="5443311" y="1361770"/>
-                  </a:lnTo>
-                  <a:lnTo>
-                    <a:pt x="5514934" y="1316891"/>
-                  </a:lnTo>
-                  <a:lnTo>
-                    <a:pt x="5586557" y="1270920"/>
-                  </a:lnTo>
-                  <a:lnTo>
-                    <a:pt x="5658179" y="1223830"/>
-                  </a:lnTo>
-                  <a:lnTo>
-                    <a:pt x="5729802" y="1175596"/>
-                  </a:lnTo>
-                  <a:lnTo>
-                    <a:pt x="5801424" y="1126188"/>
-                  </a:lnTo>
-                  <a:lnTo>
-                    <a:pt x="5873047" y="1075577"/>
-                  </a:lnTo>
-                  <a:lnTo>
-                    <a:pt x="5944669" y="1023736"/>
-                  </a:lnTo>
-                  <a:lnTo>
-                    <a:pt x="6016292" y="970633"/>
-                  </a:lnTo>
-                  <a:lnTo>
-                    <a:pt x="6087914" y="916239"/>
-                  </a:lnTo>
-                  <a:lnTo>
-                    <a:pt x="6159537" y="860522"/>
-                  </a:lnTo>
-                  <a:lnTo>
-                    <a:pt x="6231159" y="803448"/>
-                  </a:lnTo>
-                  <a:lnTo>
-                    <a:pt x="6302782" y="744987"/>
-                  </a:lnTo>
-                  <a:lnTo>
-                    <a:pt x="6374404" y="685103"/>
-                  </a:lnTo>
-                  <a:lnTo>
-                    <a:pt x="6446027" y="623763"/>
-                  </a:lnTo>
-                  <a:lnTo>
-                    <a:pt x="6517649" y="560930"/>
-                  </a:lnTo>
-                  <a:lnTo>
-                    <a:pt x="6589272" y="496569"/>
-                  </a:lnTo>
-                  <a:lnTo>
-                    <a:pt x="6660894" y="430642"/>
-                  </a:lnTo>
-                  <a:lnTo>
-                    <a:pt x="6732517" y="363111"/>
-                  </a:lnTo>
-                  <a:lnTo>
-                    <a:pt x="6804139" y="293937"/>
-                  </a:lnTo>
-                  <a:lnTo>
-                    <a:pt x="6875762" y="223080"/>
-                  </a:lnTo>
-                  <a:lnTo>
-                    <a:pt x="6947385" y="150500"/>
-                  </a:lnTo>
-                  <a:lnTo>
-                    <a:pt x="7019007" y="76154"/>
+                    <a:pt x="71622" y="2499930"/>
+                  </a:lnTo>
+                  <a:lnTo>
+                    <a:pt x="143245" y="2504432"/>
+                  </a:lnTo>
+                  <a:lnTo>
+                    <a:pt x="214867" y="2508913"/>
+                  </a:lnTo>
+                  <a:lnTo>
+                    <a:pt x="286490" y="2513376"/>
+                  </a:lnTo>
+                  <a:lnTo>
+                    <a:pt x="358112" y="2517819"/>
+                  </a:lnTo>
+                  <a:lnTo>
+                    <a:pt x="429735" y="2522243"/>
+                  </a:lnTo>
+                  <a:lnTo>
+                    <a:pt x="501357" y="2526649"/>
+                  </a:lnTo>
+                  <a:lnTo>
+                    <a:pt x="572980" y="2531035"/>
+                  </a:lnTo>
+                  <a:lnTo>
+                    <a:pt x="644602" y="2535402"/>
+                  </a:lnTo>
+                  <a:lnTo>
+                    <a:pt x="716225" y="2539751"/>
+                  </a:lnTo>
+                  <a:lnTo>
+                    <a:pt x="787847" y="2544081"/>
+                  </a:lnTo>
+                  <a:lnTo>
+                    <a:pt x="859470" y="2548392"/>
+                  </a:lnTo>
+                  <a:lnTo>
+                    <a:pt x="931092" y="2552685"/>
+                  </a:lnTo>
+                  <a:lnTo>
+                    <a:pt x="1002715" y="2556960"/>
+                  </a:lnTo>
+                  <a:lnTo>
+                    <a:pt x="1074337" y="2561216"/>
+                  </a:lnTo>
+                  <a:lnTo>
+                    <a:pt x="1145960" y="2565453"/>
+                  </a:lnTo>
+                  <a:lnTo>
+                    <a:pt x="1217582" y="2569673"/>
+                  </a:lnTo>
+                  <a:lnTo>
+                    <a:pt x="1289205" y="2573874"/>
+                  </a:lnTo>
+                  <a:lnTo>
+                    <a:pt x="1360827" y="2578058"/>
+                  </a:lnTo>
+                  <a:lnTo>
+                    <a:pt x="1432450" y="2582223"/>
+                  </a:lnTo>
+                  <a:lnTo>
+                    <a:pt x="1504073" y="2586370"/>
+                  </a:lnTo>
+                  <a:lnTo>
+                    <a:pt x="1575695" y="2590500"/>
+                  </a:lnTo>
+                  <a:lnTo>
+                    <a:pt x="1647318" y="2594612"/>
+                  </a:lnTo>
+                  <a:lnTo>
+                    <a:pt x="1718940" y="2598706"/>
+                  </a:lnTo>
+                  <a:lnTo>
+                    <a:pt x="1790563" y="2602783"/>
+                  </a:lnTo>
+                  <a:lnTo>
+                    <a:pt x="1862185" y="2606842"/>
+                  </a:lnTo>
+                  <a:lnTo>
+                    <a:pt x="1933808" y="2610884"/>
+                  </a:lnTo>
+                  <a:lnTo>
+                    <a:pt x="2005430" y="2614908"/>
+                  </a:lnTo>
+                  <a:lnTo>
+                    <a:pt x="2077053" y="2618915"/>
+                  </a:lnTo>
+                  <a:lnTo>
+                    <a:pt x="2148675" y="2622904"/>
+                  </a:lnTo>
+                  <a:lnTo>
+                    <a:pt x="2220298" y="2626877"/>
+                  </a:lnTo>
+                  <a:lnTo>
+                    <a:pt x="2291920" y="2630833"/>
+                  </a:lnTo>
+                  <a:lnTo>
+                    <a:pt x="2363543" y="2634771"/>
+                  </a:lnTo>
+                  <a:lnTo>
+                    <a:pt x="2435165" y="2638693"/>
+                  </a:lnTo>
+                  <a:lnTo>
+                    <a:pt x="2506788" y="2642598"/>
+                  </a:lnTo>
+                  <a:lnTo>
+                    <a:pt x="2578410" y="2646485"/>
+                  </a:lnTo>
+                  <a:lnTo>
+                    <a:pt x="2650033" y="2650357"/>
+                  </a:lnTo>
+                  <a:lnTo>
+                    <a:pt x="2721655" y="2654211"/>
+                  </a:lnTo>
+                  <a:lnTo>
+                    <a:pt x="2793278" y="2658049"/>
+                  </a:lnTo>
+                  <a:lnTo>
+                    <a:pt x="2864901" y="2661871"/>
+                  </a:lnTo>
+                  <a:lnTo>
+                    <a:pt x="2936523" y="2665676"/>
+                  </a:lnTo>
+                  <a:lnTo>
+                    <a:pt x="3008146" y="2669465"/>
+                  </a:lnTo>
+                  <a:lnTo>
+                    <a:pt x="3079768" y="2673237"/>
+                  </a:lnTo>
+                  <a:lnTo>
+                    <a:pt x="3151391" y="2676994"/>
+                  </a:lnTo>
+                  <a:lnTo>
+                    <a:pt x="3223013" y="2658355"/>
+                  </a:lnTo>
+                  <a:lnTo>
+                    <a:pt x="3294636" y="2635280"/>
+                  </a:lnTo>
+                  <a:lnTo>
+                    <a:pt x="3366258" y="2611605"/>
+                  </a:lnTo>
+                  <a:lnTo>
+                    <a:pt x="3437881" y="2587316"/>
+                  </a:lnTo>
+                  <a:lnTo>
+                    <a:pt x="3509503" y="2562397"/>
+                  </a:lnTo>
+                  <a:lnTo>
+                    <a:pt x="3581126" y="2536830"/>
+                  </a:lnTo>
+                  <a:lnTo>
+                    <a:pt x="3652748" y="2510600"/>
+                  </a:lnTo>
+                  <a:lnTo>
+                    <a:pt x="3724371" y="2483689"/>
+                  </a:lnTo>
+                  <a:lnTo>
+                    <a:pt x="3795993" y="2456079"/>
+                  </a:lnTo>
+                  <a:lnTo>
+                    <a:pt x="3867616" y="2427753"/>
+                  </a:lnTo>
+                  <a:lnTo>
+                    <a:pt x="3939238" y="2398691"/>
+                  </a:lnTo>
+                  <a:lnTo>
+                    <a:pt x="4010861" y="2368875"/>
+                  </a:lnTo>
+                  <a:lnTo>
+                    <a:pt x="4082483" y="2338284"/>
+                  </a:lnTo>
+                  <a:lnTo>
+                    <a:pt x="4154106" y="2306900"/>
+                  </a:lnTo>
+                  <a:lnTo>
+                    <a:pt x="4225729" y="2274700"/>
+                  </a:lnTo>
+                  <a:lnTo>
+                    <a:pt x="4297351" y="2241665"/>
+                  </a:lnTo>
+                  <a:lnTo>
+                    <a:pt x="4368974" y="2207773"/>
+                  </a:lnTo>
+                  <a:lnTo>
+                    <a:pt x="4440596" y="2173000"/>
+                  </a:lnTo>
+                  <a:lnTo>
+                    <a:pt x="4512219" y="2137325"/>
+                  </a:lnTo>
+                  <a:lnTo>
+                    <a:pt x="4583841" y="2100723"/>
+                  </a:lnTo>
+                  <a:lnTo>
+                    <a:pt x="4655464" y="2063171"/>
+                  </a:lnTo>
+                  <a:lnTo>
+                    <a:pt x="4727086" y="2024645"/>
+                  </a:lnTo>
+                  <a:lnTo>
+                    <a:pt x="4798709" y="1985118"/>
+                  </a:lnTo>
+                  <a:lnTo>
+                    <a:pt x="4870331" y="1944565"/>
+                  </a:lnTo>
+                  <a:lnTo>
+                    <a:pt x="4941954" y="1902960"/>
+                  </a:lnTo>
+                  <a:lnTo>
+                    <a:pt x="5013576" y="1860274"/>
+                  </a:lnTo>
+                  <a:lnTo>
+                    <a:pt x="5085199" y="1816480"/>
+                  </a:lnTo>
+                  <a:lnTo>
+                    <a:pt x="5156821" y="1771550"/>
+                  </a:lnTo>
+                  <a:lnTo>
+                    <a:pt x="5228444" y="1725453"/>
+                  </a:lnTo>
+                  <a:lnTo>
+                    <a:pt x="5300066" y="1678159"/>
+                  </a:lnTo>
+                  <a:lnTo>
+                    <a:pt x="5371689" y="1629637"/>
+                  </a:lnTo>
+                  <a:lnTo>
+                    <a:pt x="5443311" y="1579856"/>
+                  </a:lnTo>
+                  <a:lnTo>
+                    <a:pt x="5514934" y="1528783"/>
+                  </a:lnTo>
+                  <a:lnTo>
+                    <a:pt x="5586557" y="1476383"/>
+                  </a:lnTo>
+                  <a:lnTo>
+                    <a:pt x="5658179" y="1422623"/>
+                  </a:lnTo>
+                  <a:lnTo>
+                    <a:pt x="5729802" y="1367468"/>
+                  </a:lnTo>
+                  <a:lnTo>
+                    <a:pt x="5801424" y="1310881"/>
+                  </a:lnTo>
+                  <a:lnTo>
+                    <a:pt x="5873047" y="1252825"/>
+                  </a:lnTo>
+                  <a:lnTo>
+                    <a:pt x="5944669" y="1193261"/>
+                  </a:lnTo>
+                  <a:lnTo>
+                    <a:pt x="6016292" y="1132152"/>
+                  </a:lnTo>
+                  <a:lnTo>
+                    <a:pt x="6087914" y="1069455"/>
+                  </a:lnTo>
+                  <a:lnTo>
+                    <a:pt x="6159537" y="1005132"/>
+                  </a:lnTo>
+                  <a:lnTo>
+                    <a:pt x="6231159" y="939138"/>
+                  </a:lnTo>
+                  <a:lnTo>
+                    <a:pt x="6302782" y="871431"/>
+                  </a:lnTo>
+                  <a:lnTo>
+                    <a:pt x="6374404" y="801967"/>
+                  </a:lnTo>
+                  <a:lnTo>
+                    <a:pt x="6446027" y="730699"/>
+                  </a:lnTo>
+                  <a:lnTo>
+                    <a:pt x="6517649" y="657581"/>
+                  </a:lnTo>
+                  <a:lnTo>
+                    <a:pt x="6589272" y="582565"/>
+                  </a:lnTo>
+                  <a:lnTo>
+                    <a:pt x="6660894" y="505602"/>
+                  </a:lnTo>
+                  <a:lnTo>
+                    <a:pt x="6732517" y="426640"/>
+                  </a:lnTo>
+                  <a:lnTo>
+                    <a:pt x="6804139" y="345629"/>
+                  </a:lnTo>
+                  <a:lnTo>
+                    <a:pt x="6875762" y="262514"/>
+                  </a:lnTo>
+                  <a:lnTo>
+                    <a:pt x="6947385" y="177242"/>
+                  </a:lnTo>
+                  <a:lnTo>
+                    <a:pt x="7019007" y="89756"/>
                   </a:lnTo>
                   <a:lnTo>
                     <a:pt x="7090630" y="0"/>
@@ -3915,312 +3915,312 @@
           </p:nvSpPr>
           <p:spPr>
             <a:xfrm>
-              <a:off x="1172049" y="4680794"/>
-              <a:ext cx="7090630" cy="571515"/>
+              <a:off x="1172049" y="4682714"/>
+              <a:ext cx="7090630" cy="585972"/>
             </a:xfrm>
             <a:custGeom>
               <a:avLst/>
               <a:pathLst>
-                <a:path w="7090630" h="571515">
+                <a:path w="7090630" h="585972">
                   <a:moveTo>
-                    <a:pt x="7090630" y="208223"/>
+                    <a:pt x="7090630" y="179812"/>
                   </a:moveTo>
                   <a:lnTo>
-                    <a:pt x="7019007" y="204863"/>
-                  </a:lnTo>
-                  <a:lnTo>
-                    <a:pt x="6947385" y="201486"/>
-                  </a:lnTo>
-                  <a:lnTo>
-                    <a:pt x="6875762" y="198092"/>
-                  </a:lnTo>
-                  <a:lnTo>
-                    <a:pt x="6804139" y="194680"/>
-                  </a:lnTo>
-                  <a:lnTo>
-                    <a:pt x="6732517" y="191251"/>
-                  </a:lnTo>
-                  <a:lnTo>
-                    <a:pt x="6660894" y="187804"/>
-                  </a:lnTo>
-                  <a:lnTo>
-                    <a:pt x="6589272" y="184340"/>
-                  </a:lnTo>
-                  <a:lnTo>
-                    <a:pt x="6517649" y="180859"/>
-                  </a:lnTo>
-                  <a:lnTo>
-                    <a:pt x="6446027" y="177359"/>
-                  </a:lnTo>
-                  <a:lnTo>
-                    <a:pt x="6374404" y="173842"/>
-                  </a:lnTo>
-                  <a:lnTo>
-                    <a:pt x="6302782" y="170307"/>
-                  </a:lnTo>
-                  <a:lnTo>
-                    <a:pt x="6231159" y="166754"/>
-                  </a:lnTo>
-                  <a:lnTo>
-                    <a:pt x="6159537" y="163183"/>
-                  </a:lnTo>
-                  <a:lnTo>
-                    <a:pt x="6087914" y="159594"/>
-                  </a:lnTo>
-                  <a:lnTo>
-                    <a:pt x="6016292" y="155986"/>
-                  </a:lnTo>
-                  <a:lnTo>
-                    <a:pt x="5944669" y="152360"/>
-                  </a:lnTo>
-                  <a:lnTo>
-                    <a:pt x="5873047" y="148716"/>
-                  </a:lnTo>
-                  <a:lnTo>
-                    <a:pt x="5801424" y="145053"/>
-                  </a:lnTo>
-                  <a:lnTo>
-                    <a:pt x="5729802" y="141371"/>
-                  </a:lnTo>
-                  <a:lnTo>
-                    <a:pt x="5658179" y="137671"/>
-                  </a:lnTo>
-                  <a:lnTo>
-                    <a:pt x="5586557" y="133952"/>
-                  </a:lnTo>
-                  <a:lnTo>
-                    <a:pt x="5514934" y="130213"/>
-                  </a:lnTo>
-                  <a:lnTo>
-                    <a:pt x="5443311" y="126456"/>
-                  </a:lnTo>
-                  <a:lnTo>
-                    <a:pt x="5371689" y="122680"/>
-                  </a:lnTo>
-                  <a:lnTo>
-                    <a:pt x="5300066" y="118885"/>
-                  </a:lnTo>
-                  <a:lnTo>
-                    <a:pt x="5228444" y="115070"/>
-                  </a:lnTo>
-                  <a:lnTo>
-                    <a:pt x="5156821" y="111236"/>
-                  </a:lnTo>
-                  <a:lnTo>
-                    <a:pt x="5085199" y="107382"/>
-                  </a:lnTo>
-                  <a:lnTo>
-                    <a:pt x="5013576" y="103509"/>
-                  </a:lnTo>
-                  <a:lnTo>
-                    <a:pt x="4941954" y="99615"/>
-                  </a:lnTo>
-                  <a:lnTo>
-                    <a:pt x="4870331" y="95703"/>
-                  </a:lnTo>
-                  <a:lnTo>
-                    <a:pt x="4798709" y="91770"/>
-                  </a:lnTo>
-                  <a:lnTo>
-                    <a:pt x="4727086" y="87817"/>
-                  </a:lnTo>
-                  <a:lnTo>
-                    <a:pt x="4655464" y="83844"/>
-                  </a:lnTo>
-                  <a:lnTo>
-                    <a:pt x="4583841" y="79851"/>
-                  </a:lnTo>
-                  <a:lnTo>
-                    <a:pt x="4512219" y="75838"/>
-                  </a:lnTo>
-                  <a:lnTo>
-                    <a:pt x="4440596" y="71804"/>
-                  </a:lnTo>
-                  <a:lnTo>
-                    <a:pt x="4368974" y="67749"/>
-                  </a:lnTo>
-                  <a:lnTo>
-                    <a:pt x="4297351" y="63674"/>
-                  </a:lnTo>
-                  <a:lnTo>
-                    <a:pt x="4225729" y="59578"/>
-                  </a:lnTo>
-                  <a:lnTo>
-                    <a:pt x="4154106" y="55462"/>
-                  </a:lnTo>
-                  <a:lnTo>
-                    <a:pt x="4082483" y="51324"/>
-                  </a:lnTo>
-                  <a:lnTo>
-                    <a:pt x="4010861" y="47166"/>
-                  </a:lnTo>
-                  <a:lnTo>
-                    <a:pt x="3939238" y="42986"/>
-                  </a:lnTo>
-                  <a:lnTo>
-                    <a:pt x="3867616" y="38785"/>
-                  </a:lnTo>
-                  <a:lnTo>
-                    <a:pt x="3795993" y="34562"/>
-                  </a:lnTo>
-                  <a:lnTo>
-                    <a:pt x="3724371" y="30318"/>
-                  </a:lnTo>
-                  <a:lnTo>
-                    <a:pt x="3652748" y="26053"/>
-                  </a:lnTo>
-                  <a:lnTo>
-                    <a:pt x="3581126" y="21765"/>
-                  </a:lnTo>
-                  <a:lnTo>
-                    <a:pt x="3509503" y="17456"/>
-                  </a:lnTo>
-                  <a:lnTo>
-                    <a:pt x="3437881" y="13125"/>
-                  </a:lnTo>
-                  <a:lnTo>
-                    <a:pt x="3366258" y="8772"/>
-                  </a:lnTo>
-                  <a:lnTo>
-                    <a:pt x="3294636" y="4397"/>
+                    <a:pt x="7019007" y="176848"/>
+                  </a:lnTo>
+                  <a:lnTo>
+                    <a:pt x="6947385" y="173871"/>
+                  </a:lnTo>
+                  <a:lnTo>
+                    <a:pt x="6875762" y="170881"/>
+                  </a:lnTo>
+                  <a:lnTo>
+                    <a:pt x="6804139" y="167879"/>
+                  </a:lnTo>
+                  <a:lnTo>
+                    <a:pt x="6732517" y="164863"/>
+                  </a:lnTo>
+                  <a:lnTo>
+                    <a:pt x="6660894" y="161835"/>
+                  </a:lnTo>
+                  <a:lnTo>
+                    <a:pt x="6589272" y="158793"/>
+                  </a:lnTo>
+                  <a:lnTo>
+                    <a:pt x="6517649" y="155738"/>
+                  </a:lnTo>
+                  <a:lnTo>
+                    <a:pt x="6446027" y="152670"/>
+                  </a:lnTo>
+                  <a:lnTo>
+                    <a:pt x="6374404" y="149589"/>
+                  </a:lnTo>
+                  <a:lnTo>
+                    <a:pt x="6302782" y="146495"/>
+                  </a:lnTo>
+                  <a:lnTo>
+                    <a:pt x="6231159" y="143387"/>
+                  </a:lnTo>
+                  <a:lnTo>
+                    <a:pt x="6159537" y="140266"/>
+                  </a:lnTo>
+                  <a:lnTo>
+                    <a:pt x="6087914" y="137131"/>
+                  </a:lnTo>
+                  <a:lnTo>
+                    <a:pt x="6016292" y="133983"/>
+                  </a:lnTo>
+                  <a:lnTo>
+                    <a:pt x="5944669" y="130821"/>
+                  </a:lnTo>
+                  <a:lnTo>
+                    <a:pt x="5873047" y="127646"/>
+                  </a:lnTo>
+                  <a:lnTo>
+                    <a:pt x="5801424" y="124457"/>
+                  </a:lnTo>
+                  <a:lnTo>
+                    <a:pt x="5729802" y="121254"/>
+                  </a:lnTo>
+                  <a:lnTo>
+                    <a:pt x="5658179" y="118037"/>
+                  </a:lnTo>
+                  <a:lnTo>
+                    <a:pt x="5586557" y="114806"/>
+                  </a:lnTo>
+                  <a:lnTo>
+                    <a:pt x="5514934" y="111562"/>
+                  </a:lnTo>
+                  <a:lnTo>
+                    <a:pt x="5443311" y="108303"/>
+                  </a:lnTo>
+                  <a:lnTo>
+                    <a:pt x="5371689" y="105030"/>
+                  </a:lnTo>
+                  <a:lnTo>
+                    <a:pt x="5300066" y="101744"/>
+                  </a:lnTo>
+                  <a:lnTo>
+                    <a:pt x="5228444" y="98443"/>
+                  </a:lnTo>
+                  <a:lnTo>
+                    <a:pt x="5156821" y="95127"/>
+                  </a:lnTo>
+                  <a:lnTo>
+                    <a:pt x="5085199" y="91798"/>
+                  </a:lnTo>
+                  <a:lnTo>
+                    <a:pt x="5013576" y="88454"/>
+                  </a:lnTo>
+                  <a:lnTo>
+                    <a:pt x="4941954" y="85096"/>
+                  </a:lnTo>
+                  <a:lnTo>
+                    <a:pt x="4870331" y="81723"/>
+                  </a:lnTo>
+                  <a:lnTo>
+                    <a:pt x="4798709" y="78335"/>
+                  </a:lnTo>
+                  <a:lnTo>
+                    <a:pt x="4727086" y="74933"/>
+                  </a:lnTo>
+                  <a:lnTo>
+                    <a:pt x="4655464" y="71517"/>
+                  </a:lnTo>
+                  <a:lnTo>
+                    <a:pt x="4583841" y="68085"/>
+                  </a:lnTo>
+                  <a:lnTo>
+                    <a:pt x="4512219" y="64639"/>
+                  </a:lnTo>
+                  <a:lnTo>
+                    <a:pt x="4440596" y="61178"/>
+                  </a:lnTo>
+                  <a:lnTo>
+                    <a:pt x="4368974" y="57702"/>
+                  </a:lnTo>
+                  <a:lnTo>
+                    <a:pt x="4297351" y="54211"/>
+                  </a:lnTo>
+                  <a:lnTo>
+                    <a:pt x="4225729" y="50705"/>
+                  </a:lnTo>
+                  <a:lnTo>
+                    <a:pt x="4154106" y="47183"/>
+                  </a:lnTo>
+                  <a:lnTo>
+                    <a:pt x="4082483" y="43647"/>
+                  </a:lnTo>
+                  <a:lnTo>
+                    <a:pt x="4010861" y="40095"/>
+                  </a:lnTo>
+                  <a:lnTo>
+                    <a:pt x="3939238" y="36528"/>
+                  </a:lnTo>
+                  <a:lnTo>
+                    <a:pt x="3867616" y="32946"/>
+                  </a:lnTo>
+                  <a:lnTo>
+                    <a:pt x="3795993" y="29348"/>
+                  </a:lnTo>
+                  <a:lnTo>
+                    <a:pt x="3724371" y="25734"/>
+                  </a:lnTo>
+                  <a:lnTo>
+                    <a:pt x="3652748" y="22105"/>
+                  </a:lnTo>
+                  <a:lnTo>
+                    <a:pt x="3581126" y="18460"/>
+                  </a:lnTo>
+                  <a:lnTo>
+                    <a:pt x="3509503" y="14800"/>
+                  </a:lnTo>
+                  <a:lnTo>
+                    <a:pt x="3437881" y="11124"/>
+                  </a:lnTo>
+                  <a:lnTo>
+                    <a:pt x="3366258" y="7432"/>
+                  </a:lnTo>
+                  <a:lnTo>
+                    <a:pt x="3294636" y="3724"/>
                   </a:lnTo>
                   <a:lnTo>
                     <a:pt x="3223013" y="0"/>
                   </a:lnTo>
                   <a:lnTo>
-                    <a:pt x="3151391" y="13521"/>
-                  </a:lnTo>
-                  <a:lnTo>
-                    <a:pt x="3079768" y="33824"/>
-                  </a:lnTo>
-                  <a:lnTo>
-                    <a:pt x="3008146" y="53645"/>
-                  </a:lnTo>
-                  <a:lnTo>
-                    <a:pt x="2936523" y="72995"/>
-                  </a:lnTo>
-                  <a:lnTo>
-                    <a:pt x="2864901" y="91886"/>
-                  </a:lnTo>
-                  <a:lnTo>
-                    <a:pt x="2793278" y="110328"/>
-                  </a:lnTo>
-                  <a:lnTo>
-                    <a:pt x="2721655" y="128332"/>
-                  </a:lnTo>
-                  <a:lnTo>
-                    <a:pt x="2650033" y="145909"/>
-                  </a:lnTo>
-                  <a:lnTo>
-                    <a:pt x="2578410" y="163068"/>
-                  </a:lnTo>
-                  <a:lnTo>
-                    <a:pt x="2506788" y="179820"/>
-                  </a:lnTo>
-                  <a:lnTo>
-                    <a:pt x="2435165" y="196173"/>
-                  </a:lnTo>
-                  <a:lnTo>
-                    <a:pt x="2363543" y="212139"/>
-                  </a:lnTo>
-                  <a:lnTo>
-                    <a:pt x="2291920" y="227725"/>
-                  </a:lnTo>
-                  <a:lnTo>
-                    <a:pt x="2220298" y="242941"/>
-                  </a:lnTo>
-                  <a:lnTo>
-                    <a:pt x="2148675" y="257796"/>
-                  </a:lnTo>
-                  <a:lnTo>
-                    <a:pt x="2077053" y="272297"/>
-                  </a:lnTo>
-                  <a:lnTo>
-                    <a:pt x="2005430" y="286455"/>
-                  </a:lnTo>
-                  <a:lnTo>
-                    <a:pt x="1933808" y="300276"/>
-                  </a:lnTo>
-                  <a:lnTo>
-                    <a:pt x="1862185" y="313769"/>
-                  </a:lnTo>
-                  <a:lnTo>
-                    <a:pt x="1790563" y="326941"/>
-                  </a:lnTo>
-                  <a:lnTo>
-                    <a:pt x="1718940" y="339801"/>
-                  </a:lnTo>
-                  <a:lnTo>
-                    <a:pt x="1647318" y="352355"/>
-                  </a:lnTo>
-                  <a:lnTo>
-                    <a:pt x="1575695" y="364611"/>
-                  </a:lnTo>
-                  <a:lnTo>
-                    <a:pt x="1504073" y="376576"/>
-                  </a:lnTo>
-                  <a:lnTo>
-                    <a:pt x="1432450" y="388257"/>
-                  </a:lnTo>
-                  <a:lnTo>
-                    <a:pt x="1360827" y="399661"/>
-                  </a:lnTo>
-                  <a:lnTo>
-                    <a:pt x="1289205" y="410793"/>
-                  </a:lnTo>
-                  <a:lnTo>
-                    <a:pt x="1217582" y="421662"/>
-                  </a:lnTo>
-                  <a:lnTo>
-                    <a:pt x="1145960" y="432272"/>
-                  </a:lnTo>
-                  <a:lnTo>
-                    <a:pt x="1074337" y="442630"/>
-                  </a:lnTo>
-                  <a:lnTo>
-                    <a:pt x="1002715" y="452742"/>
-                  </a:lnTo>
-                  <a:lnTo>
-                    <a:pt x="931092" y="462614"/>
-                  </a:lnTo>
-                  <a:lnTo>
-                    <a:pt x="859470" y="472251"/>
-                  </a:lnTo>
-                  <a:lnTo>
-                    <a:pt x="787847" y="481660"/>
-                  </a:lnTo>
-                  <a:lnTo>
-                    <a:pt x="716225" y="490845"/>
-                  </a:lnTo>
-                  <a:lnTo>
-                    <a:pt x="644602" y="499812"/>
-                  </a:lnTo>
-                  <a:lnTo>
-                    <a:pt x="572980" y="508566"/>
-                  </a:lnTo>
-                  <a:lnTo>
-                    <a:pt x="501357" y="517113"/>
-                  </a:lnTo>
-                  <a:lnTo>
-                    <a:pt x="429735" y="525456"/>
-                  </a:lnTo>
-                  <a:lnTo>
-                    <a:pt x="358112" y="533601"/>
-                  </a:lnTo>
-                  <a:lnTo>
-                    <a:pt x="286490" y="541552"/>
-                  </a:lnTo>
-                  <a:lnTo>
-                    <a:pt x="214867" y="549315"/>
-                  </a:lnTo>
-                  <a:lnTo>
-                    <a:pt x="143245" y="556894"/>
-                  </a:lnTo>
-                  <a:lnTo>
-                    <a:pt x="71622" y="564292"/>
-                  </a:lnTo>
-                  <a:lnTo>
-                    <a:pt x="0" y="571515"/>
+                    <a:pt x="3151391" y="112"/>
+                  </a:lnTo>
+                  <a:lnTo>
+                    <a:pt x="3079768" y="22035"/>
+                  </a:lnTo>
+                  <a:lnTo>
+                    <a:pt x="3008146" y="43402"/>
+                  </a:lnTo>
+                  <a:lnTo>
+                    <a:pt x="2936523" y="64229"/>
+                  </a:lnTo>
+                  <a:lnTo>
+                    <a:pt x="2864901" y="84529"/>
+                  </a:lnTo>
+                  <a:lnTo>
+                    <a:pt x="2793278" y="104316"/>
+                  </a:lnTo>
+                  <a:lnTo>
+                    <a:pt x="2721655" y="123601"/>
+                  </a:lnTo>
+                  <a:lnTo>
+                    <a:pt x="2650033" y="142399"/>
+                  </a:lnTo>
+                  <a:lnTo>
+                    <a:pt x="2578410" y="160721"/>
+                  </a:lnTo>
+                  <a:lnTo>
+                    <a:pt x="2506788" y="178579"/>
+                  </a:lnTo>
+                  <a:lnTo>
+                    <a:pt x="2435165" y="195986"/>
+                  </a:lnTo>
+                  <a:lnTo>
+                    <a:pt x="2363543" y="212952"/>
+                  </a:lnTo>
+                  <a:lnTo>
+                    <a:pt x="2291920" y="229489"/>
+                  </a:lnTo>
+                  <a:lnTo>
+                    <a:pt x="2220298" y="245607"/>
+                  </a:lnTo>
+                  <a:lnTo>
+                    <a:pt x="2148675" y="261318"/>
+                  </a:lnTo>
+                  <a:lnTo>
+                    <a:pt x="2077053" y="276631"/>
+                  </a:lnTo>
+                  <a:lnTo>
+                    <a:pt x="2005430" y="291556"/>
+                  </a:lnTo>
+                  <a:lnTo>
+                    <a:pt x="1933808" y="306104"/>
+                  </a:lnTo>
+                  <a:lnTo>
+                    <a:pt x="1862185" y="320284"/>
+                  </a:lnTo>
+                  <a:lnTo>
+                    <a:pt x="1790563" y="334105"/>
+                  </a:lnTo>
+                  <a:lnTo>
+                    <a:pt x="1718940" y="347576"/>
+                  </a:lnTo>
+                  <a:lnTo>
+                    <a:pt x="1647318" y="360706"/>
+                  </a:lnTo>
+                  <a:lnTo>
+                    <a:pt x="1575695" y="373504"/>
+                  </a:lnTo>
+                  <a:lnTo>
+                    <a:pt x="1504073" y="385979"/>
+                  </a:lnTo>
+                  <a:lnTo>
+                    <a:pt x="1432450" y="398137"/>
+                  </a:lnTo>
+                  <a:lnTo>
+                    <a:pt x="1360827" y="409988"/>
+                  </a:lnTo>
+                  <a:lnTo>
+                    <a:pt x="1289205" y="421539"/>
+                  </a:lnTo>
+                  <a:lnTo>
+                    <a:pt x="1217582" y="432798"/>
+                  </a:lnTo>
+                  <a:lnTo>
+                    <a:pt x="1145960" y="443772"/>
+                  </a:lnTo>
+                  <a:lnTo>
+                    <a:pt x="1074337" y="454468"/>
+                  </a:lnTo>
+                  <a:lnTo>
+                    <a:pt x="1002715" y="464894"/>
+                  </a:lnTo>
+                  <a:lnTo>
+                    <a:pt x="931092" y="475056"/>
+                  </a:lnTo>
+                  <a:lnTo>
+                    <a:pt x="859470" y="484960"/>
+                  </a:lnTo>
+                  <a:lnTo>
+                    <a:pt x="787847" y="494615"/>
+                  </a:lnTo>
+                  <a:lnTo>
+                    <a:pt x="716225" y="504024"/>
+                  </a:lnTo>
+                  <a:lnTo>
+                    <a:pt x="644602" y="513196"/>
+                  </a:lnTo>
+                  <a:lnTo>
+                    <a:pt x="572980" y="522136"/>
+                  </a:lnTo>
+                  <a:lnTo>
+                    <a:pt x="501357" y="530849"/>
+                  </a:lnTo>
+                  <a:lnTo>
+                    <a:pt x="429735" y="539342"/>
+                  </a:lnTo>
+                  <a:lnTo>
+                    <a:pt x="358112" y="547620"/>
+                  </a:lnTo>
+                  <a:lnTo>
+                    <a:pt x="286490" y="555688"/>
+                  </a:lnTo>
+                  <a:lnTo>
+                    <a:pt x="214867" y="563553"/>
+                  </a:lnTo>
+                  <a:lnTo>
+                    <a:pt x="143245" y="571218"/>
+                  </a:lnTo>
+                  <a:lnTo>
+                    <a:pt x="71622" y="578690"/>
+                  </a:lnTo>
+                  <a:lnTo>
+                    <a:pt x="0" y="585972"/>
                   </a:lnTo>
                 </a:path>
               </a:pathLst>
@@ -4240,309 +4240,309 @@
           </p:nvSpPr>
           <p:spPr>
             <a:xfrm>
-              <a:off x="1172049" y="4094234"/>
-              <a:ext cx="7090630" cy="885760"/>
+              <a:off x="1172049" y="3988498"/>
+              <a:ext cx="7090630" cy="1017518"/>
             </a:xfrm>
             <a:custGeom>
               <a:avLst/>
               <a:pathLst>
-                <a:path w="7090630" h="885760">
+                <a:path w="7090630" h="1017518">
                   <a:moveTo>
-                    <a:pt x="0" y="885760"/>
+                    <a:pt x="0" y="1017518"/>
                   </a:moveTo>
                   <a:lnTo>
-                    <a:pt x="71622" y="880339"/>
-                  </a:lnTo>
-                  <a:lnTo>
-                    <a:pt x="143245" y="874865"/>
-                  </a:lnTo>
-                  <a:lnTo>
-                    <a:pt x="214867" y="869340"/>
-                  </a:lnTo>
-                  <a:lnTo>
-                    <a:pt x="286490" y="863762"/>
-                  </a:lnTo>
-                  <a:lnTo>
-                    <a:pt x="358112" y="858131"/>
-                  </a:lnTo>
-                  <a:lnTo>
-                    <a:pt x="429735" y="852446"/>
-                  </a:lnTo>
-                  <a:lnTo>
-                    <a:pt x="501357" y="846707"/>
-                  </a:lnTo>
-                  <a:lnTo>
-                    <a:pt x="572980" y="840914"/>
-                  </a:lnTo>
-                  <a:lnTo>
-                    <a:pt x="644602" y="835065"/>
-                  </a:lnTo>
-                  <a:lnTo>
-                    <a:pt x="716225" y="829160"/>
-                  </a:lnTo>
-                  <a:lnTo>
-                    <a:pt x="787847" y="823200"/>
-                  </a:lnTo>
-                  <a:lnTo>
-                    <a:pt x="859470" y="817182"/>
-                  </a:lnTo>
-                  <a:lnTo>
-                    <a:pt x="931092" y="811107"/>
-                  </a:lnTo>
-                  <a:lnTo>
-                    <a:pt x="1002715" y="804975"/>
-                  </a:lnTo>
-                  <a:lnTo>
-                    <a:pt x="1074337" y="798784"/>
-                  </a:lnTo>
-                  <a:lnTo>
-                    <a:pt x="1145960" y="792534"/>
-                  </a:lnTo>
-                  <a:lnTo>
-                    <a:pt x="1217582" y="786224"/>
-                  </a:lnTo>
-                  <a:lnTo>
-                    <a:pt x="1289205" y="779854"/>
-                  </a:lnTo>
-                  <a:lnTo>
-                    <a:pt x="1360827" y="773424"/>
-                  </a:lnTo>
-                  <a:lnTo>
-                    <a:pt x="1432450" y="766932"/>
-                  </a:lnTo>
-                  <a:lnTo>
-                    <a:pt x="1504073" y="760379"/>
-                  </a:lnTo>
-                  <a:lnTo>
-                    <a:pt x="1575695" y="753763"/>
-                  </a:lnTo>
-                  <a:lnTo>
-                    <a:pt x="1647318" y="747084"/>
-                  </a:lnTo>
-                  <a:lnTo>
-                    <a:pt x="1718940" y="740342"/>
-                  </a:lnTo>
-                  <a:lnTo>
-                    <a:pt x="1790563" y="733535"/>
-                  </a:lnTo>
-                  <a:lnTo>
-                    <a:pt x="1862185" y="726664"/>
-                  </a:lnTo>
-                  <a:lnTo>
-                    <a:pt x="1933808" y="719727"/>
-                  </a:lnTo>
-                  <a:lnTo>
-                    <a:pt x="2005430" y="712724"/>
-                  </a:lnTo>
-                  <a:lnTo>
-                    <a:pt x="2077053" y="705654"/>
-                  </a:lnTo>
-                  <a:lnTo>
-                    <a:pt x="2148675" y="698517"/>
-                  </a:lnTo>
-                  <a:lnTo>
-                    <a:pt x="2220298" y="691312"/>
-                  </a:lnTo>
-                  <a:lnTo>
-                    <a:pt x="2291920" y="684038"/>
-                  </a:lnTo>
-                  <a:lnTo>
-                    <a:pt x="2363543" y="676695"/>
-                  </a:lnTo>
-                  <a:lnTo>
-                    <a:pt x="2435165" y="669282"/>
-                  </a:lnTo>
-                  <a:lnTo>
-                    <a:pt x="2506788" y="661799"/>
-                  </a:lnTo>
-                  <a:lnTo>
-                    <a:pt x="2578410" y="654244"/>
-                  </a:lnTo>
-                  <a:lnTo>
-                    <a:pt x="2650033" y="646617"/>
-                  </a:lnTo>
-                  <a:lnTo>
-                    <a:pt x="2721655" y="638918"/>
-                  </a:lnTo>
-                  <a:lnTo>
-                    <a:pt x="2793278" y="631145"/>
-                  </a:lnTo>
-                  <a:lnTo>
-                    <a:pt x="2864901" y="623298"/>
-                  </a:lnTo>
-                  <a:lnTo>
-                    <a:pt x="2936523" y="615377"/>
-                  </a:lnTo>
-                  <a:lnTo>
-                    <a:pt x="3008146" y="607380"/>
-                  </a:lnTo>
-                  <a:lnTo>
-                    <a:pt x="3079768" y="599307"/>
-                  </a:lnTo>
-                  <a:lnTo>
-                    <a:pt x="3151391" y="591157"/>
-                  </a:lnTo>
-                  <a:lnTo>
-                    <a:pt x="3223013" y="582929"/>
-                  </a:lnTo>
-                  <a:lnTo>
-                    <a:pt x="3294636" y="574623"/>
-                  </a:lnTo>
-                  <a:lnTo>
-                    <a:pt x="3366258" y="566238"/>
-                  </a:lnTo>
-                  <a:lnTo>
-                    <a:pt x="3437881" y="557773"/>
-                  </a:lnTo>
-                  <a:lnTo>
-                    <a:pt x="3509503" y="549227"/>
-                  </a:lnTo>
-                  <a:lnTo>
-                    <a:pt x="3581126" y="540600"/>
-                  </a:lnTo>
-                  <a:lnTo>
-                    <a:pt x="3652748" y="531891"/>
-                  </a:lnTo>
-                  <a:lnTo>
-                    <a:pt x="3724371" y="523099"/>
-                  </a:lnTo>
-                  <a:lnTo>
-                    <a:pt x="3795993" y="514223"/>
-                  </a:lnTo>
-                  <a:lnTo>
-                    <a:pt x="3867616" y="505263"/>
-                  </a:lnTo>
-                  <a:lnTo>
-                    <a:pt x="3939238" y="496217"/>
-                  </a:lnTo>
-                  <a:lnTo>
-                    <a:pt x="4010861" y="487085"/>
-                  </a:lnTo>
-                  <a:lnTo>
-                    <a:pt x="4082483" y="477866"/>
-                  </a:lnTo>
-                  <a:lnTo>
-                    <a:pt x="4154106" y="468559"/>
-                  </a:lnTo>
-                  <a:lnTo>
-                    <a:pt x="4225729" y="459164"/>
-                  </a:lnTo>
-                  <a:lnTo>
-                    <a:pt x="4297351" y="449679"/>
-                  </a:lnTo>
-                  <a:lnTo>
-                    <a:pt x="4368974" y="440104"/>
-                  </a:lnTo>
-                  <a:lnTo>
-                    <a:pt x="4440596" y="430438"/>
-                  </a:lnTo>
-                  <a:lnTo>
-                    <a:pt x="4512219" y="420679"/>
-                  </a:lnTo>
-                  <a:lnTo>
-                    <a:pt x="4583841" y="410828"/>
-                  </a:lnTo>
-                  <a:lnTo>
-                    <a:pt x="4655464" y="400883"/>
-                  </a:lnTo>
-                  <a:lnTo>
-                    <a:pt x="4727086" y="390843"/>
-                  </a:lnTo>
-                  <a:lnTo>
-                    <a:pt x="4798709" y="380707"/>
-                  </a:lnTo>
-                  <a:lnTo>
-                    <a:pt x="4870331" y="370475"/>
-                  </a:lnTo>
-                  <a:lnTo>
-                    <a:pt x="4941954" y="360145"/>
-                  </a:lnTo>
-                  <a:lnTo>
-                    <a:pt x="5013576" y="349717"/>
-                  </a:lnTo>
-                  <a:lnTo>
-                    <a:pt x="5085199" y="339190"/>
-                  </a:lnTo>
-                  <a:lnTo>
-                    <a:pt x="5156821" y="328562"/>
-                  </a:lnTo>
-                  <a:lnTo>
-                    <a:pt x="5228444" y="317834"/>
-                  </a:lnTo>
-                  <a:lnTo>
-                    <a:pt x="5300066" y="307003"/>
-                  </a:lnTo>
-                  <a:lnTo>
-                    <a:pt x="5371689" y="296069"/>
-                  </a:lnTo>
-                  <a:lnTo>
-                    <a:pt x="5443311" y="285030"/>
-                  </a:lnTo>
-                  <a:lnTo>
-                    <a:pt x="5514934" y="273887"/>
-                  </a:lnTo>
-                  <a:lnTo>
-                    <a:pt x="5586557" y="262637"/>
-                  </a:lnTo>
-                  <a:lnTo>
-                    <a:pt x="5658179" y="251281"/>
-                  </a:lnTo>
-                  <a:lnTo>
-                    <a:pt x="5729802" y="239816"/>
-                  </a:lnTo>
-                  <a:lnTo>
-                    <a:pt x="5801424" y="228242"/>
-                  </a:lnTo>
-                  <a:lnTo>
-                    <a:pt x="5873047" y="216557"/>
-                  </a:lnTo>
-                  <a:lnTo>
-                    <a:pt x="5944669" y="204762"/>
-                  </a:lnTo>
-                  <a:lnTo>
-                    <a:pt x="6016292" y="192854"/>
-                  </a:lnTo>
-                  <a:lnTo>
-                    <a:pt x="6087914" y="180832"/>
-                  </a:lnTo>
-                  <a:lnTo>
-                    <a:pt x="6159537" y="168696"/>
-                  </a:lnTo>
-                  <a:lnTo>
-                    <a:pt x="6231159" y="156445"/>
-                  </a:lnTo>
-                  <a:lnTo>
-                    <a:pt x="6302782" y="144077"/>
-                  </a:lnTo>
-                  <a:lnTo>
-                    <a:pt x="6374404" y="131591"/>
-                  </a:lnTo>
-                  <a:lnTo>
-                    <a:pt x="6446027" y="118986"/>
-                  </a:lnTo>
-                  <a:lnTo>
-                    <a:pt x="6517649" y="106261"/>
-                  </a:lnTo>
-                  <a:lnTo>
-                    <a:pt x="6589272" y="93415"/>
-                  </a:lnTo>
-                  <a:lnTo>
-                    <a:pt x="6660894" y="80446"/>
-                  </a:lnTo>
-                  <a:lnTo>
-                    <a:pt x="6732517" y="67354"/>
-                  </a:lnTo>
-                  <a:lnTo>
-                    <a:pt x="6804139" y="54137"/>
-                  </a:lnTo>
-                  <a:lnTo>
-                    <a:pt x="6875762" y="40795"/>
-                  </a:lnTo>
-                  <a:lnTo>
-                    <a:pt x="6947385" y="27325"/>
-                  </a:lnTo>
-                  <a:lnTo>
-                    <a:pt x="7019007" y="13727"/>
+                    <a:pt x="71622" y="1011696"/>
+                  </a:lnTo>
+                  <a:lnTo>
+                    <a:pt x="143245" y="1005812"/>
+                  </a:lnTo>
+                  <a:lnTo>
+                    <a:pt x="214867" y="999864"/>
+                  </a:lnTo>
+                  <a:lnTo>
+                    <a:pt x="286490" y="993853"/>
+                  </a:lnTo>
+                  <a:lnTo>
+                    <a:pt x="358112" y="987778"/>
+                  </a:lnTo>
+                  <a:lnTo>
+                    <a:pt x="429735" y="981637"/>
+                  </a:lnTo>
+                  <a:lnTo>
+                    <a:pt x="501357" y="975430"/>
+                  </a:lnTo>
+                  <a:lnTo>
+                    <a:pt x="572980" y="969157"/>
+                  </a:lnTo>
+                  <a:lnTo>
+                    <a:pt x="644602" y="962817"/>
+                  </a:lnTo>
+                  <a:lnTo>
+                    <a:pt x="716225" y="956409"/>
+                  </a:lnTo>
+                  <a:lnTo>
+                    <a:pt x="787847" y="949932"/>
+                  </a:lnTo>
+                  <a:lnTo>
+                    <a:pt x="859470" y="943386"/>
+                  </a:lnTo>
+                  <a:lnTo>
+                    <a:pt x="931092" y="936769"/>
+                  </a:lnTo>
+                  <a:lnTo>
+                    <a:pt x="1002715" y="930082"/>
+                  </a:lnTo>
+                  <a:lnTo>
+                    <a:pt x="1074337" y="923323"/>
+                  </a:lnTo>
+                  <a:lnTo>
+                    <a:pt x="1145960" y="916491"/>
+                  </a:lnTo>
+                  <a:lnTo>
+                    <a:pt x="1217582" y="909587"/>
+                  </a:lnTo>
+                  <a:lnTo>
+                    <a:pt x="1289205" y="902608"/>
+                  </a:lnTo>
+                  <a:lnTo>
+                    <a:pt x="1360827" y="895555"/>
+                  </a:lnTo>
+                  <a:lnTo>
+                    <a:pt x="1432450" y="888425"/>
+                  </a:lnTo>
+                  <a:lnTo>
+                    <a:pt x="1504073" y="881220"/>
+                  </a:lnTo>
+                  <a:lnTo>
+                    <a:pt x="1575695" y="873937"/>
+                  </a:lnTo>
+                  <a:lnTo>
+                    <a:pt x="1647318" y="866576"/>
+                  </a:lnTo>
+                  <a:lnTo>
+                    <a:pt x="1718940" y="859137"/>
+                  </a:lnTo>
+                  <a:lnTo>
+                    <a:pt x="1790563" y="851617"/>
+                  </a:lnTo>
+                  <a:lnTo>
+                    <a:pt x="1862185" y="844017"/>
+                  </a:lnTo>
+                  <a:lnTo>
+                    <a:pt x="1933808" y="836336"/>
+                  </a:lnTo>
+                  <a:lnTo>
+                    <a:pt x="2005430" y="828572"/>
+                  </a:lnTo>
+                  <a:lnTo>
+                    <a:pt x="2077053" y="820725"/>
+                  </a:lnTo>
+                  <a:lnTo>
+                    <a:pt x="2148675" y="812794"/>
+                  </a:lnTo>
+                  <a:lnTo>
+                    <a:pt x="2220298" y="804778"/>
+                  </a:lnTo>
+                  <a:lnTo>
+                    <a:pt x="2291920" y="796675"/>
+                  </a:lnTo>
+                  <a:lnTo>
+                    <a:pt x="2363543" y="788487"/>
+                  </a:lnTo>
+                  <a:lnTo>
+                    <a:pt x="2435165" y="780210"/>
+                  </a:lnTo>
+                  <a:lnTo>
+                    <a:pt x="2506788" y="771845"/>
+                  </a:lnTo>
+                  <a:lnTo>
+                    <a:pt x="2578410" y="763389"/>
+                  </a:lnTo>
+                  <a:lnTo>
+                    <a:pt x="2650033" y="754844"/>
+                  </a:lnTo>
+                  <a:lnTo>
+                    <a:pt x="2721655" y="746207"/>
+                  </a:lnTo>
+                  <a:lnTo>
+                    <a:pt x="2793278" y="737477"/>
+                  </a:lnTo>
+                  <a:lnTo>
+                    <a:pt x="2864901" y="728653"/>
+                  </a:lnTo>
+                  <a:lnTo>
+                    <a:pt x="2936523" y="719735"/>
+                  </a:lnTo>
+                  <a:lnTo>
+                    <a:pt x="3008146" y="710722"/>
+                  </a:lnTo>
+                  <a:lnTo>
+                    <a:pt x="3079768" y="701612"/>
+                  </a:lnTo>
+                  <a:lnTo>
+                    <a:pt x="3151391" y="692404"/>
+                  </a:lnTo>
+                  <a:lnTo>
+                    <a:pt x="3223013" y="683097"/>
+                  </a:lnTo>
+                  <a:lnTo>
+                    <a:pt x="3294636" y="673691"/>
+                  </a:lnTo>
+                  <a:lnTo>
+                    <a:pt x="3366258" y="664184"/>
+                  </a:lnTo>
+                  <a:lnTo>
+                    <a:pt x="3437881" y="654575"/>
+                  </a:lnTo>
+                  <a:lnTo>
+                    <a:pt x="3509503" y="644863"/>
+                  </a:lnTo>
+                  <a:lnTo>
+                    <a:pt x="3581126" y="635047"/>
+                  </a:lnTo>
+                  <a:lnTo>
+                    <a:pt x="3652748" y="625126"/>
+                  </a:lnTo>
+                  <a:lnTo>
+                    <a:pt x="3724371" y="615098"/>
+                  </a:lnTo>
+                  <a:lnTo>
+                    <a:pt x="3795993" y="604963"/>
+                  </a:lnTo>
+                  <a:lnTo>
+                    <a:pt x="3867616" y="594720"/>
+                  </a:lnTo>
+                  <a:lnTo>
+                    <a:pt x="3939238" y="584366"/>
+                  </a:lnTo>
+                  <a:lnTo>
+                    <a:pt x="4010861" y="573902"/>
+                  </a:lnTo>
+                  <a:lnTo>
+                    <a:pt x="4082483" y="563325"/>
+                  </a:lnTo>
+                  <a:lnTo>
+                    <a:pt x="4154106" y="552635"/>
+                  </a:lnTo>
+                  <a:lnTo>
+                    <a:pt x="4225729" y="541831"/>
+                  </a:lnTo>
+                  <a:lnTo>
+                    <a:pt x="4297351" y="530911"/>
+                  </a:lnTo>
+                  <a:lnTo>
+                    <a:pt x="4368974" y="519873"/>
+                  </a:lnTo>
+                  <a:lnTo>
+                    <a:pt x="4440596" y="508717"/>
+                  </a:lnTo>
+                  <a:lnTo>
+                    <a:pt x="4512219" y="497442"/>
+                  </a:lnTo>
+                  <a:lnTo>
+                    <a:pt x="4583841" y="486046"/>
+                  </a:lnTo>
+                  <a:lnTo>
+                    <a:pt x="4655464" y="474528"/>
+                  </a:lnTo>
+                  <a:lnTo>
+                    <a:pt x="4727086" y="462886"/>
+                  </a:lnTo>
+                  <a:lnTo>
+                    <a:pt x="4798709" y="451120"/>
+                  </a:lnTo>
+                  <a:lnTo>
+                    <a:pt x="4870331" y="439227"/>
+                  </a:lnTo>
+                  <a:lnTo>
+                    <a:pt x="4941954" y="427207"/>
+                  </a:lnTo>
+                  <a:lnTo>
+                    <a:pt x="5013576" y="415058"/>
+                  </a:lnTo>
+                  <a:lnTo>
+                    <a:pt x="5085199" y="402779"/>
+                  </a:lnTo>
+                  <a:lnTo>
+                    <a:pt x="5156821" y="390369"/>
+                  </a:lnTo>
+                  <a:lnTo>
+                    <a:pt x="5228444" y="377825"/>
+                  </a:lnTo>
+                  <a:lnTo>
+                    <a:pt x="5300066" y="365147"/>
+                  </a:lnTo>
+                  <a:lnTo>
+                    <a:pt x="5371689" y="352333"/>
+                  </a:lnTo>
+                  <a:lnTo>
+                    <a:pt x="5443311" y="339381"/>
+                  </a:lnTo>
+                  <a:lnTo>
+                    <a:pt x="5514934" y="326291"/>
+                  </a:lnTo>
+                  <a:lnTo>
+                    <a:pt x="5586557" y="313061"/>
+                  </a:lnTo>
+                  <a:lnTo>
+                    <a:pt x="5658179" y="299688"/>
+                  </a:lnTo>
+                  <a:lnTo>
+                    <a:pt x="5729802" y="286173"/>
+                  </a:lnTo>
+                  <a:lnTo>
+                    <a:pt x="5801424" y="272512"/>
+                  </a:lnTo>
+                  <a:lnTo>
+                    <a:pt x="5873047" y="258706"/>
+                  </a:lnTo>
+                  <a:lnTo>
+                    <a:pt x="5944669" y="244751"/>
+                  </a:lnTo>
+                  <a:lnTo>
+                    <a:pt x="6016292" y="230646"/>
+                  </a:lnTo>
+                  <a:lnTo>
+                    <a:pt x="6087914" y="216391"/>
+                  </a:lnTo>
+                  <a:lnTo>
+                    <a:pt x="6159537" y="201982"/>
+                  </a:lnTo>
+                  <a:lnTo>
+                    <a:pt x="6231159" y="187419"/>
+                  </a:lnTo>
+                  <a:lnTo>
+                    <a:pt x="6302782" y="172701"/>
+                  </a:lnTo>
+                  <a:lnTo>
+                    <a:pt x="6374404" y="157824"/>
+                  </a:lnTo>
+                  <a:lnTo>
+                    <a:pt x="6446027" y="142788"/>
+                  </a:lnTo>
+                  <a:lnTo>
+                    <a:pt x="6517649" y="127590"/>
+                  </a:lnTo>
+                  <a:lnTo>
+                    <a:pt x="6589272" y="112230"/>
+                  </a:lnTo>
+                  <a:lnTo>
+                    <a:pt x="6660894" y="96706"/>
+                  </a:lnTo>
+                  <a:lnTo>
+                    <a:pt x="6732517" y="81014"/>
+                  </a:lnTo>
+                  <a:lnTo>
+                    <a:pt x="6804139" y="65155"/>
+                  </a:lnTo>
+                  <a:lnTo>
+                    <a:pt x="6875762" y="49126"/>
+                  </a:lnTo>
+                  <a:lnTo>
+                    <a:pt x="6947385" y="32925"/>
+                  </a:lnTo>
+                  <a:lnTo>
+                    <a:pt x="7019007" y="16550"/>
                   </a:lnTo>
                   <a:lnTo>
                     <a:pt x="7090630" y="0"/>
@@ -4617,7 +4617,7 @@
           </p:nvSpPr>
           <p:spPr>
             <a:xfrm>
-              <a:off x="4374536" y="1896563"/>
+              <a:off x="4334057" y="1896563"/>
               <a:ext cx="0" cy="3826579"/>
             </a:xfrm>
             <a:custGeom>
@@ -4890,7 +4890,7 @@
           </p:nvSpPr>
           <p:spPr>
             <a:xfrm>
-              <a:off x="2009531" y="5785772"/>
+              <a:off x="2008892" y="5785772"/>
               <a:ext cx="223753" cy="80101"/>
             </a:xfrm>
             <a:prstGeom prst="rect">
@@ -4936,7 +4936,7 @@
           </p:nvSpPr>
           <p:spPr>
             <a:xfrm>
-              <a:off x="4372762" y="5785772"/>
+              <a:off x="4369739" y="5785772"/>
               <a:ext cx="62179" cy="80101"/>
             </a:xfrm>
             <a:prstGeom prst="rect">
@@ -4982,7 +4982,7 @@
           </p:nvSpPr>
           <p:spPr>
             <a:xfrm>
-              <a:off x="6593026" y="5785772"/>
+              <a:off x="6587619" y="5785772"/>
               <a:ext cx="186537" cy="80101"/>
             </a:xfrm>
             <a:prstGeom prst="rect">
